--- a/Olist Project updated.pptx
+++ b/Olist Project updated.pptx
@@ -6,31 +6,41 @@
   </p:sldMasterIdLst>
   <p:sldIdLst>
     <p:sldId id="256" r:id="rId2"/>
-    <p:sldId id="257" r:id="rId3"/>
-    <p:sldId id="258" r:id="rId4"/>
-    <p:sldId id="259" r:id="rId5"/>
-    <p:sldId id="260" r:id="rId6"/>
-    <p:sldId id="261" r:id="rId7"/>
-    <p:sldId id="262" r:id="rId8"/>
-    <p:sldId id="273" r:id="rId9"/>
-    <p:sldId id="269" r:id="rId10"/>
-    <p:sldId id="270" r:id="rId11"/>
-    <p:sldId id="271" r:id="rId12"/>
-    <p:sldId id="274" r:id="rId13"/>
-    <p:sldId id="277" r:id="rId14"/>
-    <p:sldId id="278" r:id="rId15"/>
-    <p:sldId id="279" r:id="rId16"/>
-    <p:sldId id="280" r:id="rId17"/>
-    <p:sldId id="281" r:id="rId18"/>
-    <p:sldId id="282" r:id="rId19"/>
-    <p:sldId id="283" r:id="rId20"/>
-    <p:sldId id="284" r:id="rId21"/>
-    <p:sldId id="285" r:id="rId22"/>
-    <p:sldId id="286" r:id="rId23"/>
-    <p:sldId id="287" r:id="rId24"/>
-    <p:sldId id="288" r:id="rId25"/>
-    <p:sldId id="289" r:id="rId26"/>
-    <p:sldId id="290" r:id="rId27"/>
+    <p:sldId id="300" r:id="rId3"/>
+    <p:sldId id="257" r:id="rId4"/>
+    <p:sldId id="258" r:id="rId5"/>
+    <p:sldId id="259" r:id="rId6"/>
+    <p:sldId id="260" r:id="rId7"/>
+    <p:sldId id="261" r:id="rId8"/>
+    <p:sldId id="262" r:id="rId9"/>
+    <p:sldId id="273" r:id="rId10"/>
+    <p:sldId id="269" r:id="rId11"/>
+    <p:sldId id="270" r:id="rId12"/>
+    <p:sldId id="271" r:id="rId13"/>
+    <p:sldId id="274" r:id="rId14"/>
+    <p:sldId id="277" r:id="rId15"/>
+    <p:sldId id="278" r:id="rId16"/>
+    <p:sldId id="279" r:id="rId17"/>
+    <p:sldId id="280" r:id="rId18"/>
+    <p:sldId id="281" r:id="rId19"/>
+    <p:sldId id="282" r:id="rId20"/>
+    <p:sldId id="283" r:id="rId21"/>
+    <p:sldId id="284" r:id="rId22"/>
+    <p:sldId id="285" r:id="rId23"/>
+    <p:sldId id="286" r:id="rId24"/>
+    <p:sldId id="287" r:id="rId25"/>
+    <p:sldId id="288" r:id="rId26"/>
+    <p:sldId id="289" r:id="rId27"/>
+    <p:sldId id="290" r:id="rId28"/>
+    <p:sldId id="291" r:id="rId29"/>
+    <p:sldId id="292" r:id="rId30"/>
+    <p:sldId id="293" r:id="rId31"/>
+    <p:sldId id="294" r:id="rId32"/>
+    <p:sldId id="295" r:id="rId33"/>
+    <p:sldId id="296" r:id="rId34"/>
+    <p:sldId id="297" r:id="rId35"/>
+    <p:sldId id="298" r:id="rId36"/>
+    <p:sldId id="299" r:id="rId37"/>
   </p:sldIdLst>
   <p:sldSz cx="12192000" cy="6858000"/>
   <p:notesSz cx="6858000" cy="9144000"/>
@@ -3098,6 +3108,154 @@
           <p:cNvPr id="2" name="Title 1">
             <a:extLst>
               <a:ext uri="{FF2B5EF4-FFF2-40B4-BE49-F238E27FC236}">
+                <a16:creationId xmlns:a16="http://schemas.microsoft.com/office/drawing/2014/main" id="{6A65815F-268F-D02B-F3CD-2CC87977DDB0}"/>
+              </a:ext>
+            </a:extLst>
+          </p:cNvPr>
+          <p:cNvSpPr>
+            <a:spLocks noGrp="1"/>
+          </p:cNvSpPr>
+          <p:nvPr>
+            <p:ph type="title"/>
+          </p:nvPr>
+        </p:nvSpPr>
+        <p:spPr/>
+        <p:txBody>
+          <a:bodyPr/>
+          <a:lstStyle/>
+          <a:p>
+            <a:r>
+              <a:rPr lang="en-US" dirty="0">
+                <a:ea typeface="+mj-lt"/>
+                <a:cs typeface="+mj-lt"/>
+              </a:rPr>
+              <a:t>how can we improve customer experience and satisfaction?</a:t>
+            </a:r>
+            <a:endParaRPr lang="en-US" dirty="0"/>
+          </a:p>
+        </p:txBody>
+      </p:sp>
+      <p:sp>
+        <p:nvSpPr>
+          <p:cNvPr id="3" name="Content Placeholder 2">
+            <a:extLst>
+              <a:ext uri="{FF2B5EF4-FFF2-40B4-BE49-F238E27FC236}">
+                <a16:creationId xmlns:a16="http://schemas.microsoft.com/office/drawing/2014/main" id="{859362E9-0117-5F56-7250-43D98A78EE20}"/>
+              </a:ext>
+            </a:extLst>
+          </p:cNvPr>
+          <p:cNvSpPr>
+            <a:spLocks noGrp="1"/>
+          </p:cNvSpPr>
+          <p:nvPr>
+            <p:ph idx="1"/>
+          </p:nvPr>
+        </p:nvSpPr>
+        <p:spPr/>
+        <p:txBody>
+          <a:bodyPr vert="horz" lIns="91440" tIns="45720" rIns="91440" bIns="45720" rtlCol="0" anchor="t">
+            <a:normAutofit lnSpcReduction="10000"/>
+          </a:bodyPr>
+          <a:lstStyle/>
+          <a:p>
+            <a:r>
+              <a:rPr lang="en-US" dirty="0">
+                <a:ea typeface="+mn-lt"/>
+                <a:cs typeface="+mn-lt"/>
+              </a:rPr>
+              <a:t>According to comments</a:t>
+            </a:r>
+            <a:endParaRPr lang="en-US" dirty="0"/>
+          </a:p>
+          <a:p>
+            <a:endParaRPr lang="en-US"/>
+          </a:p>
+          <a:p>
+            <a:r>
+              <a:rPr lang="en-US" dirty="0">
+                <a:ea typeface="+mn-lt"/>
+                <a:cs typeface="+mn-lt"/>
+              </a:rPr>
+              <a:t>deliver the item within the deadline</a:t>
+            </a:r>
+            <a:endParaRPr lang="en-US" dirty="0"/>
+          </a:p>
+          <a:p>
+            <a:endParaRPr lang="en-US"/>
+          </a:p>
+          <a:p>
+            <a:r>
+              <a:rPr lang="en-US" dirty="0">
+                <a:ea typeface="+mn-lt"/>
+                <a:cs typeface="+mn-lt"/>
+              </a:rPr>
+              <a:t>deliver all ordered items</a:t>
+            </a:r>
+            <a:endParaRPr lang="en-US" dirty="0"/>
+          </a:p>
+          <a:p>
+            <a:endParaRPr lang="en-US"/>
+          </a:p>
+          <a:p>
+            <a:r>
+              <a:rPr lang="en-US" dirty="0">
+                <a:ea typeface="+mn-lt"/>
+                <a:cs typeface="+mn-lt"/>
+              </a:rPr>
+              <a:t> Better communication with customers regarding latest updates</a:t>
+            </a:r>
+            <a:endParaRPr lang="en-US" dirty="0"/>
+          </a:p>
+          <a:p>
+            <a:endParaRPr lang="en-US"/>
+          </a:p>
+          <a:p>
+            <a:r>
+              <a:rPr lang="en-US" dirty="0">
+                <a:ea typeface="+mn-lt"/>
+                <a:cs typeface="+mn-lt"/>
+              </a:rPr>
+              <a:t>Improve quality and good packaging of product</a:t>
+            </a:r>
+            <a:endParaRPr lang="en-US" dirty="0"/>
+          </a:p>
+        </p:txBody>
+      </p:sp>
+    </p:spTree>
+    <p:extLst>
+      <p:ext uri="{BB962C8B-B14F-4D97-AF65-F5344CB8AC3E}">
+        <p14:creationId xmlns:p14="http://schemas.microsoft.com/office/powerpoint/2010/main" val="2120510006"/>
+      </p:ext>
+    </p:extLst>
+  </p:cSld>
+  <p:clrMapOvr>
+    <a:masterClrMapping/>
+  </p:clrMapOvr>
+</p:sld>
+</file>
+
+<file path=ppt/slides/slide11.xml><?xml version="1.0" encoding="utf-8"?>
+<p:sld xmlns:a="http://schemas.openxmlformats.org/drawingml/2006/main" xmlns:r="http://schemas.openxmlformats.org/officeDocument/2006/relationships" xmlns:p="http://schemas.openxmlformats.org/presentationml/2006/main">
+  <p:cSld>
+    <p:spTree>
+      <p:nvGrpSpPr>
+        <p:cNvPr id="1" name=""/>
+        <p:cNvGrpSpPr/>
+        <p:nvPr/>
+      </p:nvGrpSpPr>
+      <p:grpSpPr>
+        <a:xfrm>
+          <a:off x="0" y="0"/>
+          <a:ext cx="0" cy="0"/>
+          <a:chOff x="0" y="0"/>
+          <a:chExt cx="0" cy="0"/>
+        </a:xfrm>
+      </p:grpSpPr>
+      <p:sp>
+        <p:nvSpPr>
+          <p:cNvPr id="2" name="Title 1">
+            <a:extLst>
+              <a:ext uri="{FF2B5EF4-FFF2-40B4-BE49-F238E27FC236}">
                 <a16:creationId xmlns:a16="http://schemas.microsoft.com/office/drawing/2014/main" id="{2372B25C-C401-D92A-D9AE-C42AE7CAF625}"/>
               </a:ext>
             </a:extLst>
@@ -3186,7 +3344,7 @@
 </p:sld>
 </file>
 
-<file path=ppt/slides/slide11.xml><?xml version="1.0" encoding="utf-8"?>
+<file path=ppt/slides/slide12.xml><?xml version="1.0" encoding="utf-8"?>
 <p:sld xmlns:a="http://schemas.openxmlformats.org/drawingml/2006/main" xmlns:r="http://schemas.openxmlformats.org/officeDocument/2006/relationships" xmlns:p="http://schemas.openxmlformats.org/presentationml/2006/main">
   <p:cSld>
     <p:bg>
@@ -3256,7 +3414,7 @@
 </p:sld>
 </file>
 
-<file path=ppt/slides/slide12.xml><?xml version="1.0" encoding="utf-8"?>
+<file path=ppt/slides/slide13.xml><?xml version="1.0" encoding="utf-8"?>
 <p:sld xmlns:a="http://schemas.openxmlformats.org/drawingml/2006/main" xmlns:r="http://schemas.openxmlformats.org/officeDocument/2006/relationships" xmlns:p="http://schemas.openxmlformats.org/presentationml/2006/main">
   <p:cSld>
     <p:spTree>
@@ -3321,7 +3479,7 @@
 </p:sld>
 </file>
 
-<file path=ppt/slides/slide13.xml><?xml version="1.0" encoding="utf-8"?>
+<file path=ppt/slides/slide14.xml><?xml version="1.0" encoding="utf-8"?>
 <p:sld xmlns:a="http://schemas.openxmlformats.org/drawingml/2006/main" xmlns:r="http://schemas.openxmlformats.org/officeDocument/2006/relationships" xmlns:p="http://schemas.openxmlformats.org/presentationml/2006/main">
   <p:cSld>
     <p:spTree>
@@ -3462,7 +3620,7 @@
 </p:sld>
 </file>
 
-<file path=ppt/slides/slide14.xml><?xml version="1.0" encoding="utf-8"?>
+<file path=ppt/slides/slide15.xml><?xml version="1.0" encoding="utf-8"?>
 <p:sld xmlns:a="http://schemas.openxmlformats.org/drawingml/2006/main" xmlns:r="http://schemas.openxmlformats.org/officeDocument/2006/relationships" xmlns:p="http://schemas.openxmlformats.org/presentationml/2006/main">
   <p:cSld>
     <p:spTree>
@@ -3600,7 +3758,7 @@
 </p:sld>
 </file>
 
-<file path=ppt/slides/slide15.xml><?xml version="1.0" encoding="utf-8"?>
+<file path=ppt/slides/slide16.xml><?xml version="1.0" encoding="utf-8"?>
 <p:sld xmlns:a="http://schemas.openxmlformats.org/drawingml/2006/main" xmlns:r="http://schemas.openxmlformats.org/officeDocument/2006/relationships" xmlns:p="http://schemas.openxmlformats.org/presentationml/2006/main">
   <p:cSld>
     <p:spTree>
@@ -3707,7 +3865,7 @@
 </p:sld>
 </file>
 
-<file path=ppt/slides/slide16.xml><?xml version="1.0" encoding="utf-8"?>
+<file path=ppt/slides/slide17.xml><?xml version="1.0" encoding="utf-8"?>
 <p:sld xmlns:a="http://schemas.openxmlformats.org/drawingml/2006/main" xmlns:r="http://schemas.openxmlformats.org/officeDocument/2006/relationships" xmlns:p="http://schemas.openxmlformats.org/presentationml/2006/main">
   <p:cSld>
     <p:spTree>
@@ -3817,7 +3975,7 @@
 </p:sld>
 </file>
 
-<file path=ppt/slides/slide17.xml><?xml version="1.0" encoding="utf-8"?>
+<file path=ppt/slides/slide18.xml><?xml version="1.0" encoding="utf-8"?>
 <p:sld xmlns:a="http://schemas.openxmlformats.org/drawingml/2006/main" xmlns:r="http://schemas.openxmlformats.org/officeDocument/2006/relationships" xmlns:p="http://schemas.openxmlformats.org/presentationml/2006/main">
   <p:cSld>
     <p:spTree>
@@ -3914,7 +4072,7 @@
 </p:sld>
 </file>
 
-<file path=ppt/slides/slide18.xml><?xml version="1.0" encoding="utf-8"?>
+<file path=ppt/slides/slide19.xml><?xml version="1.0" encoding="utf-8"?>
 <p:sld xmlns:a="http://schemas.openxmlformats.org/drawingml/2006/main" xmlns:r="http://schemas.openxmlformats.org/officeDocument/2006/relationships" xmlns:p="http://schemas.openxmlformats.org/presentationml/2006/main">
   <p:cSld>
     <p:spTree>
@@ -4052,7 +4210,105 @@
 </p:sld>
 </file>
 
-<file path=ppt/slides/slide19.xml><?xml version="1.0" encoding="utf-8"?>
+<file path=ppt/slides/slide2.xml><?xml version="1.0" encoding="utf-8"?>
+<p:sld xmlns:a="http://schemas.openxmlformats.org/drawingml/2006/main" xmlns:r="http://schemas.openxmlformats.org/officeDocument/2006/relationships" xmlns:p="http://schemas.openxmlformats.org/presentationml/2006/main">
+  <p:cSld>
+    <p:spTree>
+      <p:nvGrpSpPr>
+        <p:cNvPr id="1" name=""/>
+        <p:cNvGrpSpPr/>
+        <p:nvPr/>
+      </p:nvGrpSpPr>
+      <p:grpSpPr>
+        <a:xfrm>
+          <a:off x="0" y="0"/>
+          <a:ext cx="0" cy="0"/>
+          <a:chOff x="0" y="0"/>
+          <a:chExt cx="0" cy="0"/>
+        </a:xfrm>
+      </p:grpSpPr>
+      <p:sp>
+        <p:nvSpPr>
+          <p:cNvPr id="2" name="Title 1">
+            <a:extLst>
+              <a:ext uri="{FF2B5EF4-FFF2-40B4-BE49-F238E27FC236}">
+                <a16:creationId xmlns:a16="http://schemas.microsoft.com/office/drawing/2014/main" id="{B31F36F7-B606-71D1-925A-7DC5FB7B02AE}"/>
+              </a:ext>
+            </a:extLst>
+          </p:cNvPr>
+          <p:cNvSpPr>
+            <a:spLocks noGrp="1"/>
+          </p:cNvSpPr>
+          <p:nvPr>
+            <p:ph type="title"/>
+          </p:nvPr>
+        </p:nvSpPr>
+        <p:spPr/>
+        <p:txBody>
+          <a:bodyPr/>
+          <a:lstStyle/>
+          <a:p>
+            <a:r>
+              <a:rPr lang="en-US" b="1" dirty="0"/>
+              <a:t>Problem Statement</a:t>
+            </a:r>
+            <a:endParaRPr lang="en-US" dirty="0"/>
+          </a:p>
+        </p:txBody>
+      </p:sp>
+      <p:sp>
+        <p:nvSpPr>
+          <p:cNvPr id="3" name="Content Placeholder 2">
+            <a:extLst>
+              <a:ext uri="{FF2B5EF4-FFF2-40B4-BE49-F238E27FC236}">
+                <a16:creationId xmlns:a16="http://schemas.microsoft.com/office/drawing/2014/main" id="{F4D970A5-C03C-2061-946F-92C65B845CE1}"/>
+              </a:ext>
+            </a:extLst>
+          </p:cNvPr>
+          <p:cNvSpPr>
+            <a:spLocks noGrp="1"/>
+          </p:cNvSpPr>
+          <p:nvPr>
+            <p:ph idx="1"/>
+          </p:nvPr>
+        </p:nvSpPr>
+        <p:spPr/>
+        <p:txBody>
+          <a:bodyPr/>
+          <a:lstStyle/>
+          <a:p>
+            <a:pPr marL="0" indent="0">
+              <a:buNone/>
+            </a:pPr>
+            <a:r>
+              <a:rPr lang="en-US" dirty="0"/>
+              <a:t>Between 2016 and 2018, </a:t>
+            </a:r>
+            <a:r>
+              <a:rPr lang="en-US" dirty="0" err="1"/>
+              <a:t>Olist</a:t>
+            </a:r>
+            <a:r>
+              <a:rPr lang="en-US" dirty="0"/>
+              <a:t> in Brazil kept an average review score of 4.1, which is in the satisfied range. However, 11.5% of customers still gave 1-star reviews. This raises the need to understand what drove these negative experiences and what steps can fix them.</a:t>
+            </a:r>
+          </a:p>
+        </p:txBody>
+      </p:sp>
+    </p:spTree>
+    <p:extLst>
+      <p:ext uri="{BB962C8B-B14F-4D97-AF65-F5344CB8AC3E}">
+        <p14:creationId xmlns:p14="http://schemas.microsoft.com/office/powerpoint/2010/main" val="2608577944"/>
+      </p:ext>
+    </p:extLst>
+  </p:cSld>
+  <p:clrMapOvr>
+    <a:masterClrMapping/>
+  </p:clrMapOvr>
+</p:sld>
+</file>
+
+<file path=ppt/slides/slide20.xml><?xml version="1.0" encoding="utf-8"?>
 <p:sld xmlns:a="http://schemas.openxmlformats.org/drawingml/2006/main" xmlns:r="http://schemas.openxmlformats.org/officeDocument/2006/relationships" xmlns:p="http://schemas.openxmlformats.org/presentationml/2006/main">
   <p:cSld>
     <p:spTree>
@@ -4159,200 +4415,7 @@
 </p:sld>
 </file>
 
-<file path=ppt/slides/slide2.xml><?xml version="1.0" encoding="utf-8"?>
-<p:sld xmlns:a="http://schemas.openxmlformats.org/drawingml/2006/main" xmlns:r="http://schemas.openxmlformats.org/officeDocument/2006/relationships" xmlns:p="http://schemas.openxmlformats.org/presentationml/2006/main">
-  <p:cSld>
-    <p:spTree>
-      <p:nvGrpSpPr>
-        <p:cNvPr id="1" name=""/>
-        <p:cNvGrpSpPr/>
-        <p:nvPr/>
-      </p:nvGrpSpPr>
-      <p:grpSpPr>
-        <a:xfrm>
-          <a:off x="0" y="0"/>
-          <a:ext cx="0" cy="0"/>
-          <a:chOff x="0" y="0"/>
-          <a:chExt cx="0" cy="0"/>
-        </a:xfrm>
-      </p:grpSpPr>
-      <p:sp>
-        <p:nvSpPr>
-          <p:cNvPr id="2" name="Title 1">
-            <a:extLst>
-              <a:ext uri="{FF2B5EF4-FFF2-40B4-BE49-F238E27FC236}">
-                <a16:creationId xmlns:a16="http://schemas.microsoft.com/office/drawing/2014/main" id="{AC10ACDB-BF6D-C1A7-578A-69534DF35CAA}"/>
-              </a:ext>
-            </a:extLst>
-          </p:cNvPr>
-          <p:cNvSpPr>
-            <a:spLocks noGrp="1"/>
-          </p:cNvSpPr>
-          <p:nvPr>
-            <p:ph type="title"/>
-          </p:nvPr>
-        </p:nvSpPr>
-        <p:spPr/>
-        <p:txBody>
-          <a:bodyPr/>
-          <a:lstStyle/>
-          <a:p>
-            <a:r>
-              <a:rPr lang="en-US" dirty="0">
-                <a:latin typeface="Arial"/>
-                <a:ea typeface="+mj-lt"/>
-                <a:cs typeface="Arial"/>
-              </a:rPr>
-              <a:t>What are the different categories of customer reviews?</a:t>
-            </a:r>
-            <a:endParaRPr lang="en-US">
-              <a:latin typeface="Arial"/>
-              <a:cs typeface="Arial"/>
-            </a:endParaRPr>
-          </a:p>
-          <a:p>
-            <a:endParaRPr lang="en-US"/>
-          </a:p>
-        </p:txBody>
-      </p:sp>
-      <p:sp>
-        <p:nvSpPr>
-          <p:cNvPr id="3" name="Content Placeholder 2">
-            <a:extLst>
-              <a:ext uri="{FF2B5EF4-FFF2-40B4-BE49-F238E27FC236}">
-                <a16:creationId xmlns:a16="http://schemas.microsoft.com/office/drawing/2014/main" id="{1335621C-033B-6562-A406-EA4DBA84F300}"/>
-              </a:ext>
-            </a:extLst>
-          </p:cNvPr>
-          <p:cNvSpPr>
-            <a:spLocks noGrp="1"/>
-          </p:cNvSpPr>
-          <p:nvPr>
-            <p:ph idx="1"/>
-          </p:nvPr>
-        </p:nvSpPr>
-        <p:spPr/>
-        <p:txBody>
-          <a:bodyPr vert="horz" lIns="91440" tIns="45720" rIns="91440" bIns="45720" rtlCol="0" anchor="t">
-            <a:normAutofit/>
-          </a:bodyPr>
-          <a:lstStyle/>
-          <a:p>
-            <a:r>
-              <a:rPr lang="en-US" sz="2400" b="1" dirty="0">
-                <a:highlight>
-                  <a:srgbClr val="FFFFFF"/>
-                </a:highlight>
-                <a:latin typeface="Arial"/>
-                <a:ea typeface="+mn-lt"/>
-                <a:cs typeface="Arial"/>
-              </a:rPr>
-              <a:t>1- Highly unsatisfied </a:t>
-            </a:r>
-            <a:endParaRPr lang="en-US" sz="2400" b="1">
-              <a:highlight>
-                <a:srgbClr val="FFFFFF"/>
-              </a:highlight>
-              <a:latin typeface="Arial"/>
-              <a:cs typeface="Arial"/>
-            </a:endParaRPr>
-          </a:p>
-          <a:p>
-            <a:r>
-              <a:rPr lang="en-US" sz="2400" b="1" dirty="0">
-                <a:highlight>
-                  <a:srgbClr val="FFFFFF"/>
-                </a:highlight>
-                <a:latin typeface="Arial"/>
-                <a:ea typeface="+mn-lt"/>
-                <a:cs typeface="Arial"/>
-              </a:rPr>
-              <a:t>2- Unsatisfied </a:t>
-            </a:r>
-            <a:endParaRPr lang="en-US" sz="2400" b="1">
-              <a:highlight>
-                <a:srgbClr val="FFFFFF"/>
-              </a:highlight>
-              <a:latin typeface="Arial"/>
-              <a:cs typeface="Arial"/>
-            </a:endParaRPr>
-          </a:p>
-          <a:p>
-            <a:r>
-              <a:rPr lang="en-US" sz="2400" b="1" dirty="0">
-                <a:highlight>
-                  <a:srgbClr val="FFFFFF"/>
-                </a:highlight>
-                <a:latin typeface="Arial"/>
-                <a:ea typeface="+mn-lt"/>
-                <a:cs typeface="Arial"/>
-              </a:rPr>
-              <a:t>3- Neutral </a:t>
-            </a:r>
-            <a:endParaRPr lang="en-US" sz="2400" b="1">
-              <a:highlight>
-                <a:srgbClr val="FFFFFF"/>
-              </a:highlight>
-              <a:latin typeface="Arial"/>
-              <a:cs typeface="Arial"/>
-            </a:endParaRPr>
-          </a:p>
-          <a:p>
-            <a:r>
-              <a:rPr lang="en-US" sz="2400" b="1" dirty="0">
-                <a:highlight>
-                  <a:srgbClr val="FFFFFF"/>
-                </a:highlight>
-                <a:latin typeface="Arial"/>
-                <a:ea typeface="+mn-lt"/>
-                <a:cs typeface="Arial"/>
-              </a:rPr>
-              <a:t>4- Satisfied </a:t>
-            </a:r>
-            <a:endParaRPr lang="en-US" sz="2400" b="1">
-              <a:highlight>
-                <a:srgbClr val="FFFFFF"/>
-              </a:highlight>
-              <a:latin typeface="Arial"/>
-              <a:cs typeface="Arial"/>
-            </a:endParaRPr>
-          </a:p>
-          <a:p>
-            <a:r>
-              <a:rPr lang="en-US" sz="2400" b="1" dirty="0">
-                <a:highlight>
-                  <a:srgbClr val="FFFFFF"/>
-                </a:highlight>
-                <a:latin typeface="Arial"/>
-                <a:ea typeface="+mn-lt"/>
-                <a:cs typeface="Arial"/>
-              </a:rPr>
-              <a:t>5- Highly satisfied </a:t>
-            </a:r>
-            <a:endParaRPr lang="en-US" sz="2400" b="1">
-              <a:highlight>
-                <a:srgbClr val="FFFFFF"/>
-              </a:highlight>
-              <a:latin typeface="Arial"/>
-              <a:cs typeface="Arial"/>
-            </a:endParaRPr>
-          </a:p>
-        </p:txBody>
-      </p:sp>
-    </p:spTree>
-    <p:extLst>
-      <p:ext uri="{BB962C8B-B14F-4D97-AF65-F5344CB8AC3E}">
-        <p14:creationId xmlns:p14="http://schemas.microsoft.com/office/powerpoint/2010/main" val="1323770901"/>
-      </p:ext>
-    </p:extLst>
-  </p:cSld>
-  <p:clrMapOvr>
-    <a:masterClrMapping/>
-  </p:clrMapOvr>
-</p:sld>
-</file>
-
-<file path=ppt/slides/slide20.xml><?xml version="1.0" encoding="utf-8"?>
+<file path=ppt/slides/slide21.xml><?xml version="1.0" encoding="utf-8"?>
 <p:sld xmlns:a="http://schemas.openxmlformats.org/drawingml/2006/main" xmlns:r="http://schemas.openxmlformats.org/officeDocument/2006/relationships" xmlns:p="http://schemas.openxmlformats.org/presentationml/2006/main">
   <p:cSld>
     <p:spTree>
@@ -4418,7 +4481,7 @@
 </p:sld>
 </file>
 
-<file path=ppt/slides/slide21.xml><?xml version="1.0" encoding="utf-8"?>
+<file path=ppt/slides/slide22.xml><?xml version="1.0" encoding="utf-8"?>
 <p:sld xmlns:a="http://schemas.openxmlformats.org/drawingml/2006/main" xmlns:r="http://schemas.openxmlformats.org/officeDocument/2006/relationships" xmlns:p="http://schemas.openxmlformats.org/presentationml/2006/main">
   <p:cSld>
     <p:spTree>
@@ -4520,7 +4583,7 @@
 </p:sld>
 </file>
 
-<file path=ppt/slides/slide22.xml><?xml version="1.0" encoding="utf-8"?>
+<file path=ppt/slides/slide23.xml><?xml version="1.0" encoding="utf-8"?>
 <p:sld xmlns:a="http://schemas.openxmlformats.org/drawingml/2006/main" xmlns:r="http://schemas.openxmlformats.org/officeDocument/2006/relationships" xmlns:p="http://schemas.openxmlformats.org/presentationml/2006/main">
   <p:cSld>
     <p:spTree>
@@ -4622,7 +4685,7 @@
 </p:sld>
 </file>
 
-<file path=ppt/slides/slide23.xml><?xml version="1.0" encoding="utf-8"?>
+<file path=ppt/slides/slide24.xml><?xml version="1.0" encoding="utf-8"?>
 <p:sld xmlns:a="http://schemas.openxmlformats.org/drawingml/2006/main" xmlns:r="http://schemas.openxmlformats.org/officeDocument/2006/relationships" xmlns:p="http://schemas.openxmlformats.org/presentationml/2006/main">
   <p:cSld>
     <p:spTree>
@@ -4724,7 +4787,7 @@
 </p:sld>
 </file>
 
-<file path=ppt/slides/slide24.xml><?xml version="1.0" encoding="utf-8"?>
+<file path=ppt/slides/slide25.xml><?xml version="1.0" encoding="utf-8"?>
 <p:sld xmlns:a="http://schemas.openxmlformats.org/drawingml/2006/main" xmlns:r="http://schemas.openxmlformats.org/officeDocument/2006/relationships" xmlns:p="http://schemas.openxmlformats.org/presentationml/2006/main">
   <p:cSld>
     <p:spTree>
@@ -4826,7 +4889,7 @@
 </p:sld>
 </file>
 
-<file path=ppt/slides/slide25.xml><?xml version="1.0" encoding="utf-8"?>
+<file path=ppt/slides/slide26.xml><?xml version="1.0" encoding="utf-8"?>
 <p:sld xmlns:a="http://schemas.openxmlformats.org/drawingml/2006/main" xmlns:r="http://schemas.openxmlformats.org/officeDocument/2006/relationships" xmlns:p="http://schemas.openxmlformats.org/presentationml/2006/main">
   <p:cSld>
     <p:spTree>
@@ -4892,7 +4955,7 @@
 </p:sld>
 </file>
 
-<file path=ppt/slides/slide26.xml><?xml version="1.0" encoding="utf-8"?>
+<file path=ppt/slides/slide27.xml><?xml version="1.0" encoding="utf-8"?>
 <p:sld xmlns:a="http://schemas.openxmlformats.org/drawingml/2006/main" xmlns:r="http://schemas.openxmlformats.org/officeDocument/2006/relationships" xmlns:p="http://schemas.openxmlformats.org/presentationml/2006/main">
   <p:cSld>
     <p:spTree>
@@ -4999,6 +5062,210 @@
 </p:sld>
 </file>
 
+<file path=ppt/slides/slide28.xml><?xml version="1.0" encoding="utf-8"?>
+<p:sld xmlns:a="http://schemas.openxmlformats.org/drawingml/2006/main" xmlns:r="http://schemas.openxmlformats.org/officeDocument/2006/relationships" xmlns:p="http://schemas.openxmlformats.org/presentationml/2006/main">
+  <p:cSld>
+    <p:spTree>
+      <p:nvGrpSpPr>
+        <p:cNvPr id="1" name=""/>
+        <p:cNvGrpSpPr/>
+        <p:nvPr/>
+      </p:nvGrpSpPr>
+      <p:grpSpPr>
+        <a:xfrm>
+          <a:off x="0" y="0"/>
+          <a:ext cx="0" cy="0"/>
+          <a:chOff x="0" y="0"/>
+          <a:chExt cx="0" cy="0"/>
+        </a:xfrm>
+      </p:grpSpPr>
+      <p:sp>
+        <p:nvSpPr>
+          <p:cNvPr id="2" name="Title 1">
+            <a:extLst>
+              <a:ext uri="{FF2B5EF4-FFF2-40B4-BE49-F238E27FC236}">
+                <a16:creationId xmlns:a16="http://schemas.microsoft.com/office/drawing/2014/main" id="{A4E20BFA-7053-3A0C-7BCE-A58FC31DB85D}"/>
+              </a:ext>
+            </a:extLst>
+          </p:cNvPr>
+          <p:cNvSpPr>
+            <a:spLocks noGrp="1"/>
+          </p:cNvSpPr>
+          <p:nvPr>
+            <p:ph type="title"/>
+          </p:nvPr>
+        </p:nvSpPr>
+        <p:spPr/>
+        <p:txBody>
+          <a:bodyPr>
+            <a:normAutofit fontScale="90000"/>
+          </a:bodyPr>
+          <a:lstStyle/>
+          <a:p>
+            <a:r>
+              <a:rPr lang="en-US" dirty="0"/>
+              <a:t>Which states or regions have the highest and lowest average satisfaction?</a:t>
+            </a:r>
+            <a:br>
+              <a:rPr lang="en-US" dirty="0"/>
+            </a:br>
+            <a:endParaRPr lang="en-US" dirty="0"/>
+          </a:p>
+        </p:txBody>
+      </p:sp>
+      <p:pic>
+        <p:nvPicPr>
+          <p:cNvPr id="5" name="Content Placeholder 4">
+            <a:extLst>
+              <a:ext uri="{FF2B5EF4-FFF2-40B4-BE49-F238E27FC236}">
+                <a16:creationId xmlns:a16="http://schemas.microsoft.com/office/drawing/2014/main" id="{FC4E7B74-7164-F9D3-BE3C-9D964A0B960F}"/>
+              </a:ext>
+            </a:extLst>
+          </p:cNvPr>
+          <p:cNvPicPr>
+            <a:picLocks noGrp="1" noChangeAspect="1"/>
+          </p:cNvPicPr>
+          <p:nvPr>
+            <p:ph idx="1"/>
+          </p:nvPr>
+        </p:nvPicPr>
+        <p:blipFill>
+          <a:blip r:embed="rId2">
+            <a:extLst>
+              <a:ext uri="{28A0092B-C50C-407E-A947-70E740481C1C}">
+                <a14:useLocalDpi xmlns:a14="http://schemas.microsoft.com/office/drawing/2010/main" val="0"/>
+              </a:ext>
+            </a:extLst>
+          </a:blip>
+          <a:stretch>
+            <a:fillRect/>
+          </a:stretch>
+        </p:blipFill>
+        <p:spPr>
+          <a:xfrm>
+            <a:off x="3772828" y="1825625"/>
+            <a:ext cx="4646343" cy="4351338"/>
+          </a:xfrm>
+          <a:prstGeom prst="rect">
+            <a:avLst/>
+          </a:prstGeom>
+        </p:spPr>
+      </p:pic>
+    </p:spTree>
+    <p:extLst>
+      <p:ext uri="{BB962C8B-B14F-4D97-AF65-F5344CB8AC3E}">
+        <p14:creationId xmlns:p14="http://schemas.microsoft.com/office/powerpoint/2010/main" val="2206566235"/>
+      </p:ext>
+    </p:extLst>
+  </p:cSld>
+  <p:clrMapOvr>
+    <a:masterClrMapping/>
+  </p:clrMapOvr>
+</p:sld>
+</file>
+
+<file path=ppt/slides/slide29.xml><?xml version="1.0" encoding="utf-8"?>
+<p:sld xmlns:a="http://schemas.openxmlformats.org/drawingml/2006/main" xmlns:r="http://schemas.openxmlformats.org/officeDocument/2006/relationships" xmlns:p="http://schemas.openxmlformats.org/presentationml/2006/main">
+  <p:cSld>
+    <p:spTree>
+      <p:nvGrpSpPr>
+        <p:cNvPr id="1" name=""/>
+        <p:cNvGrpSpPr/>
+        <p:nvPr/>
+      </p:nvGrpSpPr>
+      <p:grpSpPr>
+        <a:xfrm>
+          <a:off x="0" y="0"/>
+          <a:ext cx="0" cy="0"/>
+          <a:chOff x="0" y="0"/>
+          <a:chExt cx="0" cy="0"/>
+        </a:xfrm>
+      </p:grpSpPr>
+      <p:sp>
+        <p:nvSpPr>
+          <p:cNvPr id="2" name="Title 1">
+            <a:extLst>
+              <a:ext uri="{FF2B5EF4-FFF2-40B4-BE49-F238E27FC236}">
+                <a16:creationId xmlns:a16="http://schemas.microsoft.com/office/drawing/2014/main" id="{49921EC9-425C-E3B6-7937-9FED96FA1881}"/>
+              </a:ext>
+            </a:extLst>
+          </p:cNvPr>
+          <p:cNvSpPr>
+            <a:spLocks noGrp="1"/>
+          </p:cNvSpPr>
+          <p:nvPr>
+            <p:ph type="title"/>
+          </p:nvPr>
+        </p:nvSpPr>
+        <p:spPr/>
+        <p:txBody>
+          <a:bodyPr>
+            <a:normAutofit fontScale="90000"/>
+          </a:bodyPr>
+          <a:lstStyle/>
+          <a:p>
+            <a:r>
+              <a:rPr lang="en-US" dirty="0"/>
+              <a:t>Why does Rio de Janeiro have a lower average compared to its neighboring states?</a:t>
+            </a:r>
+            <a:br>
+              <a:rPr lang="en-US" dirty="0"/>
+            </a:br>
+            <a:endParaRPr lang="en-US" dirty="0"/>
+          </a:p>
+        </p:txBody>
+      </p:sp>
+      <p:pic>
+        <p:nvPicPr>
+          <p:cNvPr id="5" name="Content Placeholder 4">
+            <a:extLst>
+              <a:ext uri="{FF2B5EF4-FFF2-40B4-BE49-F238E27FC236}">
+                <a16:creationId xmlns:a16="http://schemas.microsoft.com/office/drawing/2014/main" id="{C4B911E6-321F-9963-56EF-503D794FDDF1}"/>
+              </a:ext>
+            </a:extLst>
+          </p:cNvPr>
+          <p:cNvPicPr>
+            <a:picLocks noGrp="1" noChangeAspect="1"/>
+          </p:cNvPicPr>
+          <p:nvPr>
+            <p:ph idx="1"/>
+          </p:nvPr>
+        </p:nvPicPr>
+        <p:blipFill>
+          <a:blip r:embed="rId2">
+            <a:extLst>
+              <a:ext uri="{28A0092B-C50C-407E-A947-70E740481C1C}">
+                <a14:useLocalDpi xmlns:a14="http://schemas.microsoft.com/office/drawing/2010/main" val="0"/>
+              </a:ext>
+            </a:extLst>
+          </a:blip>
+          <a:stretch>
+            <a:fillRect/>
+          </a:stretch>
+        </p:blipFill>
+        <p:spPr>
+          <a:xfrm>
+            <a:off x="3613399" y="1884454"/>
+            <a:ext cx="4965202" cy="4233680"/>
+          </a:xfrm>
+          <a:prstGeom prst="rect">
+            <a:avLst/>
+          </a:prstGeom>
+        </p:spPr>
+      </p:pic>
+    </p:spTree>
+    <p:extLst>
+      <p:ext uri="{BB962C8B-B14F-4D97-AF65-F5344CB8AC3E}">
+        <p14:creationId xmlns:p14="http://schemas.microsoft.com/office/powerpoint/2010/main" val="681529207"/>
+      </p:ext>
+    </p:extLst>
+  </p:cSld>
+  <p:clrMapOvr>
+    <a:masterClrMapping/>
+  </p:clrMapOvr>
+</p:sld>
+</file>
+
 <file path=ppt/slides/slide3.xml><?xml version="1.0" encoding="utf-8"?>
 <p:sld xmlns:a="http://schemas.openxmlformats.org/drawingml/2006/main" xmlns:r="http://schemas.openxmlformats.org/officeDocument/2006/relationships" xmlns:p="http://schemas.openxmlformats.org/presentationml/2006/main">
   <p:cSld>
@@ -5021,7 +5288,7 @@
           <p:cNvPr id="2" name="Title 1">
             <a:extLst>
               <a:ext uri="{FF2B5EF4-FFF2-40B4-BE49-F238E27FC236}">
-                <a16:creationId xmlns:a16="http://schemas.microsoft.com/office/drawing/2014/main" id="{9D3CB409-102D-FE28-0A7E-B8520ABA4636}"/>
+                <a16:creationId xmlns:a16="http://schemas.microsoft.com/office/drawing/2014/main" id="{AC10ACDB-BF6D-C1A7-578A-69534DF35CAA}"/>
               </a:ext>
             </a:extLst>
           </p:cNvPr>
@@ -5039,96 +5306,835 @@
           <a:p>
             <a:r>
               <a:rPr lang="en-US" dirty="0">
+                <a:latin typeface="Arial"/>
+                <a:ea typeface="+mj-lt"/>
+                <a:cs typeface="Arial"/>
+              </a:rPr>
+              <a:t>What are the different categories of customer reviews?</a:t>
+            </a:r>
+            <a:endParaRPr lang="en-US">
+              <a:latin typeface="Arial"/>
+              <a:cs typeface="Arial"/>
+            </a:endParaRPr>
+          </a:p>
+          <a:p>
+            <a:endParaRPr lang="en-US"/>
+          </a:p>
+        </p:txBody>
+      </p:sp>
+      <p:sp>
+        <p:nvSpPr>
+          <p:cNvPr id="3" name="Content Placeholder 2">
+            <a:extLst>
+              <a:ext uri="{FF2B5EF4-FFF2-40B4-BE49-F238E27FC236}">
+                <a16:creationId xmlns:a16="http://schemas.microsoft.com/office/drawing/2014/main" id="{1335621C-033B-6562-A406-EA4DBA84F300}"/>
+              </a:ext>
+            </a:extLst>
+          </p:cNvPr>
+          <p:cNvSpPr>
+            <a:spLocks noGrp="1"/>
+          </p:cNvSpPr>
+          <p:nvPr>
+            <p:ph idx="1"/>
+          </p:nvPr>
+        </p:nvSpPr>
+        <p:spPr/>
+        <p:txBody>
+          <a:bodyPr vert="horz" lIns="91440" tIns="45720" rIns="91440" bIns="45720" rtlCol="0" anchor="t">
+            <a:normAutofit/>
+          </a:bodyPr>
+          <a:lstStyle/>
+          <a:p>
+            <a:r>
+              <a:rPr lang="en-US" sz="2400" b="1" dirty="0">
                 <a:highlight>
                   <a:srgbClr val="FFFFFF"/>
                 </a:highlight>
                 <a:latin typeface="Arial"/>
+                <a:ea typeface="+mn-lt"/>
                 <a:cs typeface="Arial"/>
               </a:rPr>
-              <a:t>Are customers satisfied with </a:t>
-            </a:r>
-            <a:r>
-              <a:rPr lang="en-US" dirty="0" err="1">
+              <a:t>2- Unsatisfied </a:t>
+            </a:r>
+            <a:endParaRPr lang="en-US" sz="2400" b="1" dirty="0">
+              <a:highlight>
+                <a:srgbClr val="FFFFFF"/>
+              </a:highlight>
+              <a:latin typeface="Arial"/>
+              <a:cs typeface="Arial"/>
+            </a:endParaRPr>
+          </a:p>
+          <a:p>
+            <a:r>
+              <a:rPr lang="en-US" sz="2400" b="1" dirty="0">
                 <a:highlight>
                   <a:srgbClr val="FFFFFF"/>
                 </a:highlight>
                 <a:latin typeface="Arial"/>
+                <a:ea typeface="+mn-lt"/>
                 <a:cs typeface="Arial"/>
               </a:rPr>
-              <a:t>Olist's</a:t>
-            </a:r>
-            <a:r>
-              <a:rPr lang="en-US" dirty="0">
+              <a:t>3- Neutral </a:t>
+            </a:r>
+            <a:endParaRPr lang="en-US" sz="2400" b="1" dirty="0">
+              <a:highlight>
+                <a:srgbClr val="FFFFFF"/>
+              </a:highlight>
+              <a:latin typeface="Arial"/>
+              <a:cs typeface="Arial"/>
+            </a:endParaRPr>
+          </a:p>
+          <a:p>
+            <a:r>
+              <a:rPr lang="en-US" sz="2400" b="1" dirty="0">
                 <a:highlight>
                   <a:srgbClr val="FFFFFF"/>
                 </a:highlight>
                 <a:latin typeface="Arial"/>
+                <a:ea typeface="+mn-lt"/>
                 <a:cs typeface="Arial"/>
               </a:rPr>
-              <a:t> products and services?</a:t>
-            </a:r>
-            <a:endParaRPr lang="en-US">
+              <a:t>4- Satisfied </a:t>
+            </a:r>
+            <a:endParaRPr lang="en-US" sz="2400" b="1" dirty="0">
+              <a:highlight>
+                <a:srgbClr val="FFFFFF"/>
+              </a:highlight>
               <a:latin typeface="Arial"/>
               <a:cs typeface="Arial"/>
             </a:endParaRPr>
           </a:p>
-          <a:p>
-            <a:endParaRPr lang="en-US" dirty="0"/>
-          </a:p>
-        </p:txBody>
-      </p:sp>
-      <p:sp>
-        <p:nvSpPr>
-          <p:cNvPr id="3" name="Content Placeholder 2">
-            <a:extLst>
-              <a:ext uri="{FF2B5EF4-FFF2-40B4-BE49-F238E27FC236}">
-                <a16:creationId xmlns:a16="http://schemas.microsoft.com/office/drawing/2014/main" id="{AB02B9E1-6887-E48D-E722-3E2E065B80F6}"/>
-              </a:ext>
-            </a:extLst>
-          </p:cNvPr>
-          <p:cNvSpPr>
-            <a:spLocks noGrp="1"/>
-          </p:cNvSpPr>
-          <p:nvPr>
-            <p:ph idx="1"/>
-          </p:nvPr>
-        </p:nvSpPr>
-        <p:spPr/>
-        <p:txBody>
-          <a:bodyPr vert="horz" lIns="91440" tIns="45720" rIns="91440" bIns="45720" rtlCol="0" anchor="t">
-            <a:normAutofit/>
-          </a:bodyPr>
-          <a:lstStyle/>
-          <a:p>
-            <a:r>
-              <a:rPr lang="en-US" dirty="0">
-                <a:ea typeface="+mn-lt"/>
-                <a:cs typeface="+mn-lt"/>
-              </a:rPr>
-              <a:t>A high percentage of customers are satisfied </a:t>
-            </a:r>
-            <a:r>
-              <a:rPr lang="en-US" dirty="0" err="1">
-                <a:ea typeface="+mn-lt"/>
-                <a:cs typeface="+mn-lt"/>
-              </a:rPr>
-              <a:t>Olist's</a:t>
-            </a:r>
-            <a:r>
-              <a:rPr lang="en-US" dirty="0">
-                <a:ea typeface="+mn-lt"/>
-                <a:cs typeface="+mn-lt"/>
-              </a:rPr>
-              <a:t> products and services.</a:t>
-            </a:r>
-            <a:endParaRPr lang="en-US" dirty="0"/>
-          </a:p>
         </p:txBody>
       </p:sp>
     </p:spTree>
     <p:extLst>
       <p:ext uri="{BB962C8B-B14F-4D97-AF65-F5344CB8AC3E}">
-        <p14:creationId xmlns:p14="http://schemas.microsoft.com/office/powerpoint/2010/main" val="2792175852"/>
+        <p14:creationId xmlns:p14="http://schemas.microsoft.com/office/powerpoint/2010/main" val="1323770901"/>
+      </p:ext>
+    </p:extLst>
+  </p:cSld>
+  <p:clrMapOvr>
+    <a:masterClrMapping/>
+  </p:clrMapOvr>
+</p:sld>
+</file>
+
+<file path=ppt/slides/slide30.xml><?xml version="1.0" encoding="utf-8"?>
+<p:sld xmlns:a="http://schemas.openxmlformats.org/drawingml/2006/main" xmlns:r="http://schemas.openxmlformats.org/officeDocument/2006/relationships" xmlns:p="http://schemas.openxmlformats.org/presentationml/2006/main">
+  <p:cSld>
+    <p:spTree>
+      <p:nvGrpSpPr>
+        <p:cNvPr id="1" name=""/>
+        <p:cNvGrpSpPr/>
+        <p:nvPr/>
+      </p:nvGrpSpPr>
+      <p:grpSpPr>
+        <a:xfrm>
+          <a:off x="0" y="0"/>
+          <a:ext cx="0" cy="0"/>
+          <a:chOff x="0" y="0"/>
+          <a:chExt cx="0" cy="0"/>
+        </a:xfrm>
+      </p:grpSpPr>
+      <p:sp>
+        <p:nvSpPr>
+          <p:cNvPr id="2" name="Title 1">
+            <a:extLst>
+              <a:ext uri="{FF2B5EF4-FFF2-40B4-BE49-F238E27FC236}">
+                <a16:creationId xmlns:a16="http://schemas.microsoft.com/office/drawing/2014/main" id="{21A26D37-35AF-27B3-F406-D3B1CDC3194C}"/>
+              </a:ext>
+            </a:extLst>
+          </p:cNvPr>
+          <p:cNvSpPr>
+            <a:spLocks noGrp="1"/>
+          </p:cNvSpPr>
+          <p:nvPr>
+            <p:ph type="title"/>
+          </p:nvPr>
+        </p:nvSpPr>
+        <p:spPr/>
+        <p:txBody>
+          <a:bodyPr>
+            <a:normAutofit fontScale="90000"/>
+          </a:bodyPr>
+          <a:lstStyle/>
+          <a:p>
+            <a:r>
+              <a:rPr lang="en-US" dirty="0"/>
+              <a:t>Which sellers or marketplaces have the lowest satisfaction scores?</a:t>
+            </a:r>
+            <a:br>
+              <a:rPr lang="en-US" dirty="0"/>
+            </a:br>
+            <a:endParaRPr lang="en-US" dirty="0"/>
+          </a:p>
+        </p:txBody>
+      </p:sp>
+      <p:pic>
+        <p:nvPicPr>
+          <p:cNvPr id="5" name="Content Placeholder 4">
+            <a:extLst>
+              <a:ext uri="{FF2B5EF4-FFF2-40B4-BE49-F238E27FC236}">
+                <a16:creationId xmlns:a16="http://schemas.microsoft.com/office/drawing/2014/main" id="{47B3FEB6-05CB-3F43-297E-0D500417B659}"/>
+              </a:ext>
+            </a:extLst>
+          </p:cNvPr>
+          <p:cNvPicPr>
+            <a:picLocks noGrp="1" noChangeAspect="1"/>
+          </p:cNvPicPr>
+          <p:nvPr>
+            <p:ph idx="1"/>
+          </p:nvPr>
+        </p:nvPicPr>
+        <p:blipFill>
+          <a:blip r:embed="rId2">
+            <a:extLst>
+              <a:ext uri="{28A0092B-C50C-407E-A947-70E740481C1C}">
+                <a14:useLocalDpi xmlns:a14="http://schemas.microsoft.com/office/drawing/2010/main" val="0"/>
+              </a:ext>
+            </a:extLst>
+          </a:blip>
+          <a:stretch>
+            <a:fillRect/>
+          </a:stretch>
+        </p:blipFill>
+        <p:spPr>
+          <a:xfrm>
+            <a:off x="3462523" y="1884454"/>
+            <a:ext cx="5266954" cy="4233680"/>
+          </a:xfrm>
+          <a:prstGeom prst="rect">
+            <a:avLst/>
+          </a:prstGeom>
+        </p:spPr>
+      </p:pic>
+    </p:spTree>
+    <p:extLst>
+      <p:ext uri="{BB962C8B-B14F-4D97-AF65-F5344CB8AC3E}">
+        <p14:creationId xmlns:p14="http://schemas.microsoft.com/office/powerpoint/2010/main" val="3505337759"/>
+      </p:ext>
+    </p:extLst>
+  </p:cSld>
+  <p:clrMapOvr>
+    <a:masterClrMapping/>
+  </p:clrMapOvr>
+</p:sld>
+</file>
+
+<file path=ppt/slides/slide31.xml><?xml version="1.0" encoding="utf-8"?>
+<p:sld xmlns:a="http://schemas.openxmlformats.org/drawingml/2006/main" xmlns:r="http://schemas.openxmlformats.org/officeDocument/2006/relationships" xmlns:p="http://schemas.openxmlformats.org/presentationml/2006/main">
+  <p:cSld>
+    <p:spTree>
+      <p:nvGrpSpPr>
+        <p:cNvPr id="1" name=""/>
+        <p:cNvGrpSpPr/>
+        <p:nvPr/>
+      </p:nvGrpSpPr>
+      <p:grpSpPr>
+        <a:xfrm>
+          <a:off x="0" y="0"/>
+          <a:ext cx="0" cy="0"/>
+          <a:chOff x="0" y="0"/>
+          <a:chExt cx="0" cy="0"/>
+        </a:xfrm>
+      </p:grpSpPr>
+      <p:sp>
+        <p:nvSpPr>
+          <p:cNvPr id="2" name="Title 1">
+            <a:extLst>
+              <a:ext uri="{FF2B5EF4-FFF2-40B4-BE49-F238E27FC236}">
+                <a16:creationId xmlns:a16="http://schemas.microsoft.com/office/drawing/2014/main" id="{418992C0-7CEF-3ACA-B0E3-8B0984390D08}"/>
+              </a:ext>
+            </a:extLst>
+          </p:cNvPr>
+          <p:cNvSpPr>
+            <a:spLocks noGrp="1"/>
+          </p:cNvSpPr>
+          <p:nvPr>
+            <p:ph type="title"/>
+          </p:nvPr>
+        </p:nvSpPr>
+        <p:spPr/>
+        <p:txBody>
+          <a:bodyPr>
+            <a:normAutofit fontScale="90000"/>
+          </a:bodyPr>
+          <a:lstStyle/>
+          <a:p>
+            <a:r>
+              <a:rPr lang="en-US" dirty="0"/>
+              <a:t>How does shipping or delivery performance affect satisfaction?</a:t>
+            </a:r>
+            <a:br>
+              <a:rPr lang="en-US" dirty="0"/>
+            </a:br>
+            <a:endParaRPr lang="en-US" dirty="0"/>
+          </a:p>
+        </p:txBody>
+      </p:sp>
+      <p:pic>
+        <p:nvPicPr>
+          <p:cNvPr id="5" name="Content Placeholder 4">
+            <a:extLst>
+              <a:ext uri="{FF2B5EF4-FFF2-40B4-BE49-F238E27FC236}">
+                <a16:creationId xmlns:a16="http://schemas.microsoft.com/office/drawing/2014/main" id="{08715135-527B-893F-A673-BA6CD990E002}"/>
+              </a:ext>
+            </a:extLst>
+          </p:cNvPr>
+          <p:cNvPicPr>
+            <a:picLocks noGrp="1" noChangeAspect="1"/>
+          </p:cNvPicPr>
+          <p:nvPr>
+            <p:ph idx="1"/>
+          </p:nvPr>
+        </p:nvPicPr>
+        <p:blipFill>
+          <a:blip r:embed="rId2">
+            <a:extLst>
+              <a:ext uri="{28A0092B-C50C-407E-A947-70E740481C1C}">
+                <a14:useLocalDpi xmlns:a14="http://schemas.microsoft.com/office/drawing/2010/main" val="0"/>
+              </a:ext>
+            </a:extLst>
+          </a:blip>
+          <a:stretch>
+            <a:fillRect/>
+          </a:stretch>
+        </p:blipFill>
+        <p:spPr>
+          <a:xfrm>
+            <a:off x="3563814" y="1825625"/>
+            <a:ext cx="5064371" cy="4351338"/>
+          </a:xfrm>
+          <a:prstGeom prst="rect">
+            <a:avLst/>
+          </a:prstGeom>
+        </p:spPr>
+      </p:pic>
+    </p:spTree>
+    <p:extLst>
+      <p:ext uri="{BB962C8B-B14F-4D97-AF65-F5344CB8AC3E}">
+        <p14:creationId xmlns:p14="http://schemas.microsoft.com/office/powerpoint/2010/main" val="1985529050"/>
+      </p:ext>
+    </p:extLst>
+  </p:cSld>
+  <p:clrMapOvr>
+    <a:masterClrMapping/>
+  </p:clrMapOvr>
+</p:sld>
+</file>
+
+<file path=ppt/slides/slide32.xml><?xml version="1.0" encoding="utf-8"?>
+<p:sld xmlns:a="http://schemas.openxmlformats.org/drawingml/2006/main" xmlns:r="http://schemas.openxmlformats.org/officeDocument/2006/relationships" xmlns:p="http://schemas.openxmlformats.org/presentationml/2006/main">
+  <p:cSld>
+    <p:spTree>
+      <p:nvGrpSpPr>
+        <p:cNvPr id="1" name=""/>
+        <p:cNvGrpSpPr/>
+        <p:nvPr/>
+      </p:nvGrpSpPr>
+      <p:grpSpPr>
+        <a:xfrm>
+          <a:off x="0" y="0"/>
+          <a:ext cx="0" cy="0"/>
+          <a:chOff x="0" y="0"/>
+          <a:chExt cx="0" cy="0"/>
+        </a:xfrm>
+      </p:grpSpPr>
+      <p:sp>
+        <p:nvSpPr>
+          <p:cNvPr id="2" name="Title 1">
+            <a:extLst>
+              <a:ext uri="{FF2B5EF4-FFF2-40B4-BE49-F238E27FC236}">
+                <a16:creationId xmlns:a16="http://schemas.microsoft.com/office/drawing/2014/main" id="{325287C5-F60E-023F-3A65-8C12AD9DB1D0}"/>
+              </a:ext>
+            </a:extLst>
+          </p:cNvPr>
+          <p:cNvSpPr>
+            <a:spLocks noGrp="1"/>
+          </p:cNvSpPr>
+          <p:nvPr>
+            <p:ph type="title"/>
+          </p:nvPr>
+        </p:nvSpPr>
+        <p:spPr/>
+        <p:txBody>
+          <a:bodyPr>
+            <a:normAutofit/>
+          </a:bodyPr>
+          <a:lstStyle/>
+          <a:p>
+            <a:r>
+              <a:rPr lang="en-US" dirty="0"/>
+              <a:t>What are the average lateness days per order, and in which categories?</a:t>
+            </a:r>
+          </a:p>
+        </p:txBody>
+      </p:sp>
+      <p:pic>
+        <p:nvPicPr>
+          <p:cNvPr id="5" name="Content Placeholder 4">
+            <a:extLst>
+              <a:ext uri="{FF2B5EF4-FFF2-40B4-BE49-F238E27FC236}">
+                <a16:creationId xmlns:a16="http://schemas.microsoft.com/office/drawing/2014/main" id="{17F90A57-2CDE-25D9-67DF-2FF8305DA83F}"/>
+              </a:ext>
+            </a:extLst>
+          </p:cNvPr>
+          <p:cNvPicPr>
+            <a:picLocks noGrp="1" noChangeAspect="1"/>
+          </p:cNvPicPr>
+          <p:nvPr>
+            <p:ph idx="1"/>
+          </p:nvPr>
+        </p:nvPicPr>
+        <p:blipFill>
+          <a:blip r:embed="rId2">
+            <a:extLst>
+              <a:ext uri="{28A0092B-C50C-407E-A947-70E740481C1C}">
+                <a14:useLocalDpi xmlns:a14="http://schemas.microsoft.com/office/drawing/2010/main" val="0"/>
+              </a:ext>
+            </a:extLst>
+          </a:blip>
+          <a:stretch>
+            <a:fillRect/>
+          </a:stretch>
+        </p:blipFill>
+        <p:spPr>
+          <a:xfrm>
+            <a:off x="838200" y="1825624"/>
+            <a:ext cx="10515600" cy="4951095"/>
+          </a:xfrm>
+          <a:prstGeom prst="rect">
+            <a:avLst/>
+          </a:prstGeom>
+        </p:spPr>
+      </p:pic>
+    </p:spTree>
+    <p:extLst>
+      <p:ext uri="{BB962C8B-B14F-4D97-AF65-F5344CB8AC3E}">
+        <p14:creationId xmlns:p14="http://schemas.microsoft.com/office/powerpoint/2010/main" val="842871370"/>
+      </p:ext>
+    </p:extLst>
+  </p:cSld>
+  <p:clrMapOvr>
+    <a:masterClrMapping/>
+  </p:clrMapOvr>
+</p:sld>
+</file>
+
+<file path=ppt/slides/slide33.xml><?xml version="1.0" encoding="utf-8"?>
+<p:sld xmlns:a="http://schemas.openxmlformats.org/drawingml/2006/main" xmlns:r="http://schemas.openxmlformats.org/officeDocument/2006/relationships" xmlns:p="http://schemas.openxmlformats.org/presentationml/2006/main">
+  <p:cSld>
+    <p:spTree>
+      <p:nvGrpSpPr>
+        <p:cNvPr id="1" name=""/>
+        <p:cNvGrpSpPr/>
+        <p:nvPr/>
+      </p:nvGrpSpPr>
+      <p:grpSpPr>
+        <a:xfrm>
+          <a:off x="0" y="0"/>
+          <a:ext cx="0" cy="0"/>
+          <a:chOff x="0" y="0"/>
+          <a:chExt cx="0" cy="0"/>
+        </a:xfrm>
+      </p:grpSpPr>
+      <p:sp>
+        <p:nvSpPr>
+          <p:cNvPr id="2" name="Title 1">
+            <a:extLst>
+              <a:ext uri="{FF2B5EF4-FFF2-40B4-BE49-F238E27FC236}">
+                <a16:creationId xmlns:a16="http://schemas.microsoft.com/office/drawing/2014/main" id="{743C34A7-DE0C-90A9-BD84-D5ED6C58683A}"/>
+              </a:ext>
+            </a:extLst>
+          </p:cNvPr>
+          <p:cNvSpPr>
+            <a:spLocks noGrp="1"/>
+          </p:cNvSpPr>
+          <p:nvPr>
+            <p:ph type="title"/>
+          </p:nvPr>
+        </p:nvSpPr>
+        <p:spPr/>
+        <p:txBody>
+          <a:bodyPr>
+            <a:normAutofit fontScale="90000"/>
+          </a:bodyPr>
+          <a:lstStyle/>
+          <a:p>
+            <a:r>
+              <a:rPr lang="en-US" sz="4000" dirty="0"/>
+              <a:t>Which categories have the highest count of late deliveries?</a:t>
+            </a:r>
+            <a:br>
+              <a:rPr lang="en-US" dirty="0"/>
+            </a:br>
+            <a:endParaRPr lang="en-US" dirty="0"/>
+          </a:p>
+        </p:txBody>
+      </p:sp>
+      <p:pic>
+        <p:nvPicPr>
+          <p:cNvPr id="5" name="Content Placeholder 4">
+            <a:extLst>
+              <a:ext uri="{FF2B5EF4-FFF2-40B4-BE49-F238E27FC236}">
+                <a16:creationId xmlns:a16="http://schemas.microsoft.com/office/drawing/2014/main" id="{DFB2E07F-AF42-5830-1768-1790FD429825}"/>
+              </a:ext>
+            </a:extLst>
+          </p:cNvPr>
+          <p:cNvPicPr>
+            <a:picLocks noGrp="1" noChangeAspect="1"/>
+          </p:cNvPicPr>
+          <p:nvPr>
+            <p:ph idx="1"/>
+          </p:nvPr>
+        </p:nvPicPr>
+        <p:blipFill>
+          <a:blip r:embed="rId2">
+            <a:extLst>
+              <a:ext uri="{28A0092B-C50C-407E-A947-70E740481C1C}">
+                <a14:useLocalDpi xmlns:a14="http://schemas.microsoft.com/office/drawing/2010/main" val="0"/>
+              </a:ext>
+            </a:extLst>
+          </a:blip>
+          <a:stretch>
+            <a:fillRect/>
+          </a:stretch>
+        </p:blipFill>
+        <p:spPr>
+          <a:xfrm>
+            <a:off x="838200" y="1690688"/>
+            <a:ext cx="9555480" cy="4802187"/>
+          </a:xfrm>
+          <a:prstGeom prst="rect">
+            <a:avLst/>
+          </a:prstGeom>
+        </p:spPr>
+      </p:pic>
+    </p:spTree>
+    <p:extLst>
+      <p:ext uri="{BB962C8B-B14F-4D97-AF65-F5344CB8AC3E}">
+        <p14:creationId xmlns:p14="http://schemas.microsoft.com/office/powerpoint/2010/main" val="1913138066"/>
+      </p:ext>
+    </p:extLst>
+  </p:cSld>
+  <p:clrMapOvr>
+    <a:masterClrMapping/>
+  </p:clrMapOvr>
+</p:sld>
+</file>
+
+<file path=ppt/slides/slide34.xml><?xml version="1.0" encoding="utf-8"?>
+<p:sld xmlns:a="http://schemas.openxmlformats.org/drawingml/2006/main" xmlns:r="http://schemas.openxmlformats.org/officeDocument/2006/relationships" xmlns:p="http://schemas.openxmlformats.org/presentationml/2006/main">
+  <p:cSld>
+    <p:spTree>
+      <p:nvGrpSpPr>
+        <p:cNvPr id="1" name=""/>
+        <p:cNvGrpSpPr/>
+        <p:nvPr/>
+      </p:nvGrpSpPr>
+      <p:grpSpPr>
+        <a:xfrm>
+          <a:off x="0" y="0"/>
+          <a:ext cx="0" cy="0"/>
+          <a:chOff x="0" y="0"/>
+          <a:chExt cx="0" cy="0"/>
+        </a:xfrm>
+      </p:grpSpPr>
+      <p:sp>
+        <p:nvSpPr>
+          <p:cNvPr id="2" name="Title 1">
+            <a:extLst>
+              <a:ext uri="{FF2B5EF4-FFF2-40B4-BE49-F238E27FC236}">
+                <a16:creationId xmlns:a16="http://schemas.microsoft.com/office/drawing/2014/main" id="{31968E2F-4337-F4BC-7F96-E63F5D54D8E4}"/>
+              </a:ext>
+            </a:extLst>
+          </p:cNvPr>
+          <p:cNvSpPr>
+            <a:spLocks noGrp="1"/>
+          </p:cNvSpPr>
+          <p:nvPr>
+            <p:ph type="title"/>
+          </p:nvPr>
+        </p:nvSpPr>
+        <p:spPr/>
+        <p:txBody>
+          <a:bodyPr>
+            <a:normAutofit fontScale="90000"/>
+          </a:bodyPr>
+          <a:lstStyle/>
+          <a:p>
+            <a:r>
+              <a:rPr lang="en-US" dirty="0"/>
+              <a:t>Which categories have the highest and lowest satisfaction rates (in % terms)?</a:t>
+            </a:r>
+            <a:br>
+              <a:rPr lang="en-US" dirty="0"/>
+            </a:br>
+            <a:endParaRPr lang="en-US" dirty="0"/>
+          </a:p>
+        </p:txBody>
+      </p:sp>
+      <p:pic>
+        <p:nvPicPr>
+          <p:cNvPr id="5" name="Content Placeholder 4">
+            <a:extLst>
+              <a:ext uri="{FF2B5EF4-FFF2-40B4-BE49-F238E27FC236}">
+                <a16:creationId xmlns:a16="http://schemas.microsoft.com/office/drawing/2014/main" id="{5567AEFE-06AB-2BD1-963A-9E35E4CDF26A}"/>
+              </a:ext>
+            </a:extLst>
+          </p:cNvPr>
+          <p:cNvPicPr>
+            <a:picLocks noGrp="1" noChangeAspect="1"/>
+          </p:cNvPicPr>
+          <p:nvPr>
+            <p:ph idx="1"/>
+          </p:nvPr>
+        </p:nvPicPr>
+        <p:blipFill>
+          <a:blip r:embed="rId2">
+            <a:extLst>
+              <a:ext uri="{28A0092B-C50C-407E-A947-70E740481C1C}">
+                <a14:useLocalDpi xmlns:a14="http://schemas.microsoft.com/office/drawing/2010/main" val="0"/>
+              </a:ext>
+            </a:extLst>
+          </a:blip>
+          <a:stretch>
+            <a:fillRect/>
+          </a:stretch>
+        </p:blipFill>
+        <p:spPr>
+          <a:xfrm>
+            <a:off x="406400" y="1825625"/>
+            <a:ext cx="10515600" cy="4667250"/>
+          </a:xfrm>
+          <a:prstGeom prst="rect">
+            <a:avLst/>
+          </a:prstGeom>
+        </p:spPr>
+      </p:pic>
+    </p:spTree>
+    <p:extLst>
+      <p:ext uri="{BB962C8B-B14F-4D97-AF65-F5344CB8AC3E}">
+        <p14:creationId xmlns:p14="http://schemas.microsoft.com/office/powerpoint/2010/main" val="3477419476"/>
+      </p:ext>
+    </p:extLst>
+  </p:cSld>
+  <p:clrMapOvr>
+    <a:masterClrMapping/>
+  </p:clrMapOvr>
+</p:sld>
+</file>
+
+<file path=ppt/slides/slide35.xml><?xml version="1.0" encoding="utf-8"?>
+<p:sld xmlns:a="http://schemas.openxmlformats.org/drawingml/2006/main" xmlns:r="http://schemas.openxmlformats.org/officeDocument/2006/relationships" xmlns:p="http://schemas.openxmlformats.org/presentationml/2006/main">
+  <p:cSld>
+    <p:spTree>
+      <p:nvGrpSpPr>
+        <p:cNvPr id="1" name=""/>
+        <p:cNvGrpSpPr/>
+        <p:nvPr/>
+      </p:nvGrpSpPr>
+      <p:grpSpPr>
+        <a:xfrm>
+          <a:off x="0" y="0"/>
+          <a:ext cx="0" cy="0"/>
+          <a:chOff x="0" y="0"/>
+          <a:chExt cx="0" cy="0"/>
+        </a:xfrm>
+      </p:grpSpPr>
+      <p:sp>
+        <p:nvSpPr>
+          <p:cNvPr id="2" name="Title 1">
+            <a:extLst>
+              <a:ext uri="{FF2B5EF4-FFF2-40B4-BE49-F238E27FC236}">
+                <a16:creationId xmlns:a16="http://schemas.microsoft.com/office/drawing/2014/main" id="{C1636A8B-8B96-D453-ABF8-39295D189D0D}"/>
+              </a:ext>
+            </a:extLst>
+          </p:cNvPr>
+          <p:cNvSpPr>
+            <a:spLocks noGrp="1"/>
+          </p:cNvSpPr>
+          <p:nvPr>
+            <p:ph type="title"/>
+          </p:nvPr>
+        </p:nvSpPr>
+        <p:spPr/>
+        <p:txBody>
+          <a:bodyPr>
+            <a:normAutofit fontScale="90000"/>
+          </a:bodyPr>
+          <a:lstStyle/>
+          <a:p>
+            <a:r>
+              <a:rPr lang="en-US" sz="3100" dirty="0"/>
+              <a:t>Does delivering earlier than the estimated delivery date significantly increase 5-star ratings, or is on-time delivery sufficient?</a:t>
+            </a:r>
+            <a:br>
+              <a:rPr lang="en-US" dirty="0"/>
+            </a:br>
+            <a:endParaRPr lang="en-US" dirty="0"/>
+          </a:p>
+        </p:txBody>
+      </p:sp>
+      <p:pic>
+        <p:nvPicPr>
+          <p:cNvPr id="5" name="Content Placeholder 4">
+            <a:extLst>
+              <a:ext uri="{FF2B5EF4-FFF2-40B4-BE49-F238E27FC236}">
+                <a16:creationId xmlns:a16="http://schemas.microsoft.com/office/drawing/2014/main" id="{440BA543-1638-241A-991D-95E1B999321C}"/>
+              </a:ext>
+            </a:extLst>
+          </p:cNvPr>
+          <p:cNvPicPr>
+            <a:picLocks noGrp="1" noChangeAspect="1"/>
+          </p:cNvPicPr>
+          <p:nvPr>
+            <p:ph idx="1"/>
+          </p:nvPr>
+        </p:nvPicPr>
+        <p:blipFill>
+          <a:blip r:embed="rId2">
+            <a:extLst>
+              <a:ext uri="{28A0092B-C50C-407E-A947-70E740481C1C}">
+                <a14:useLocalDpi xmlns:a14="http://schemas.microsoft.com/office/drawing/2010/main" val="0"/>
+              </a:ext>
+            </a:extLst>
+          </a:blip>
+          <a:stretch>
+            <a:fillRect/>
+          </a:stretch>
+        </p:blipFill>
+        <p:spPr>
+          <a:xfrm>
+            <a:off x="838200" y="1690688"/>
+            <a:ext cx="9017000" cy="4386298"/>
+          </a:xfrm>
+          <a:prstGeom prst="rect">
+            <a:avLst/>
+          </a:prstGeom>
+        </p:spPr>
+      </p:pic>
+    </p:spTree>
+    <p:extLst>
+      <p:ext uri="{BB962C8B-B14F-4D97-AF65-F5344CB8AC3E}">
+        <p14:creationId xmlns:p14="http://schemas.microsoft.com/office/powerpoint/2010/main" val="536902439"/>
+      </p:ext>
+    </p:extLst>
+  </p:cSld>
+  <p:clrMapOvr>
+    <a:masterClrMapping/>
+  </p:clrMapOvr>
+</p:sld>
+</file>
+
+<file path=ppt/slides/slide36.xml><?xml version="1.0" encoding="utf-8"?>
+<p:sld xmlns:a="http://schemas.openxmlformats.org/drawingml/2006/main" xmlns:r="http://schemas.openxmlformats.org/officeDocument/2006/relationships" xmlns:p="http://schemas.openxmlformats.org/presentationml/2006/main">
+  <p:cSld>
+    <p:spTree>
+      <p:nvGrpSpPr>
+        <p:cNvPr id="1" name=""/>
+        <p:cNvGrpSpPr/>
+        <p:nvPr/>
+      </p:nvGrpSpPr>
+      <p:grpSpPr>
+        <a:xfrm>
+          <a:off x="0" y="0"/>
+          <a:ext cx="0" cy="0"/>
+          <a:chOff x="0" y="0"/>
+          <a:chExt cx="0" cy="0"/>
+        </a:xfrm>
+      </p:grpSpPr>
+      <p:sp>
+        <p:nvSpPr>
+          <p:cNvPr id="2" name="Title 1">
+            <a:extLst>
+              <a:ext uri="{FF2B5EF4-FFF2-40B4-BE49-F238E27FC236}">
+                <a16:creationId xmlns:a16="http://schemas.microsoft.com/office/drawing/2014/main" id="{C6022F06-699E-CE07-BD4B-81A875373ED7}"/>
+              </a:ext>
+            </a:extLst>
+          </p:cNvPr>
+          <p:cNvSpPr>
+            <a:spLocks noGrp="1"/>
+          </p:cNvSpPr>
+          <p:nvPr>
+            <p:ph type="title"/>
+          </p:nvPr>
+        </p:nvSpPr>
+        <p:spPr/>
+        <p:txBody>
+          <a:bodyPr/>
+          <a:lstStyle/>
+          <a:p>
+            <a:r>
+              <a:rPr lang="en-US" b="1" dirty="0"/>
+              <a:t>Conclusion</a:t>
+            </a:r>
+            <a:endParaRPr lang="en-US" dirty="0"/>
+          </a:p>
+        </p:txBody>
+      </p:sp>
+      <p:sp>
+        <p:nvSpPr>
+          <p:cNvPr id="3" name="Content Placeholder 2">
+            <a:extLst>
+              <a:ext uri="{FF2B5EF4-FFF2-40B4-BE49-F238E27FC236}">
+                <a16:creationId xmlns:a16="http://schemas.microsoft.com/office/drawing/2014/main" id="{7975D3A6-39E2-8183-6FE2-1E3E4E577B25}"/>
+              </a:ext>
+            </a:extLst>
+          </p:cNvPr>
+          <p:cNvSpPr>
+            <a:spLocks noGrp="1"/>
+          </p:cNvSpPr>
+          <p:nvPr>
+            <p:ph idx="1"/>
+          </p:nvPr>
+        </p:nvSpPr>
+        <p:spPr/>
+        <p:txBody>
+          <a:bodyPr/>
+          <a:lstStyle/>
+          <a:p>
+            <a:pPr lvl="0" fontAlgn="base"/>
+            <a:r>
+              <a:rPr lang="en-US" b="1" dirty="0"/>
+              <a:t>Delivery is the main problem.</a:t>
+            </a:r>
+            <a:r>
+              <a:rPr lang="en-US" dirty="0"/>
+              <a:t> Of the 1-star orders, 18% were never delivered and 30% arrived late. "Not received" is the top reason in the comments.</a:t>
+            </a:r>
+          </a:p>
+          <a:p>
+            <a:pPr lvl="0" fontAlgn="base"/>
+            <a:r>
+              <a:rPr lang="en-US" b="1" dirty="0"/>
+              <a:t>Late delivery is not the only cause.</a:t>
+            </a:r>
+            <a:r>
+              <a:rPr lang="en-US" dirty="0"/>
+              <a:t> 63% of the delivered 1-star orders arrived on time, so wrong items, damaged products, and poor seller service also matter.</a:t>
+            </a:r>
+          </a:p>
+          <a:p>
+            <a:pPr lvl="0" fontAlgn="base"/>
+            <a:r>
+              <a:rPr lang="en-US" b="1" dirty="0"/>
+              <a:t>Early delivery helps.</a:t>
+            </a:r>
+            <a:r>
+              <a:rPr lang="en-US" dirty="0"/>
+              <a:t> 5★ reviews go up from about 55% (delivered on the estimated day) to about 64% (8+ days early).</a:t>
+            </a:r>
+          </a:p>
+          <a:p>
+            <a:endParaRPr lang="en-US" dirty="0"/>
+          </a:p>
+        </p:txBody>
+      </p:sp>
+    </p:spTree>
+    <p:extLst>
+      <p:ext uri="{BB962C8B-B14F-4D97-AF65-F5344CB8AC3E}">
+        <p14:creationId xmlns:p14="http://schemas.microsoft.com/office/powerpoint/2010/main" val="4081605"/>
       </p:ext>
     </p:extLst>
   </p:cSld>
@@ -5160,7 +6166,7 @@
           <p:cNvPr id="2" name="Title 1">
             <a:extLst>
               <a:ext uri="{FF2B5EF4-FFF2-40B4-BE49-F238E27FC236}">
-                <a16:creationId xmlns:a16="http://schemas.microsoft.com/office/drawing/2014/main" id="{0C465D98-4C27-1AFF-EFD2-E84698C5C239}"/>
+                <a16:creationId xmlns:a16="http://schemas.microsoft.com/office/drawing/2014/main" id="{9D3CB409-102D-FE28-0A7E-B8520ABA4636}"/>
               </a:ext>
             </a:extLst>
           </p:cNvPr>
@@ -5178,11 +6184,40 @@
           <a:p>
             <a:r>
               <a:rPr lang="en-US" dirty="0">
-                <a:ea typeface="+mj-lt"/>
-                <a:cs typeface="+mj-lt"/>
+                <a:highlight>
+                  <a:srgbClr val="FFFFFF"/>
+                </a:highlight>
+                <a:latin typeface="Arial"/>
+                <a:cs typeface="Arial"/>
               </a:rPr>
-              <a:t>Are we performing well or poorly in terms of customer satisfaction?</a:t>
-            </a:r>
+              <a:t>Are customers satisfied with </a:t>
+            </a:r>
+            <a:r>
+              <a:rPr lang="en-US" dirty="0" err="1">
+                <a:highlight>
+                  <a:srgbClr val="FFFFFF"/>
+                </a:highlight>
+                <a:latin typeface="Arial"/>
+                <a:cs typeface="Arial"/>
+              </a:rPr>
+              <a:t>Olist's</a:t>
+            </a:r>
+            <a:r>
+              <a:rPr lang="en-US" dirty="0">
+                <a:highlight>
+                  <a:srgbClr val="FFFFFF"/>
+                </a:highlight>
+                <a:latin typeface="Arial"/>
+                <a:cs typeface="Arial"/>
+              </a:rPr>
+              <a:t> products and services?</a:t>
+            </a:r>
+            <a:endParaRPr lang="en-US">
+              <a:latin typeface="Arial"/>
+              <a:cs typeface="Arial"/>
+            </a:endParaRPr>
+          </a:p>
+          <a:p>
             <a:endParaRPr lang="en-US" dirty="0"/>
           </a:p>
         </p:txBody>
@@ -5192,7 +6227,7 @@
           <p:cNvPr id="3" name="Content Placeholder 2">
             <a:extLst>
               <a:ext uri="{FF2B5EF4-FFF2-40B4-BE49-F238E27FC236}">
-                <a16:creationId xmlns:a16="http://schemas.microsoft.com/office/drawing/2014/main" id="{846EC2FF-CFA1-0A4C-1487-9631A3B330AA}"/>
+                <a16:creationId xmlns:a16="http://schemas.microsoft.com/office/drawing/2014/main" id="{AB02B9E1-6887-E48D-E722-3E2E065B80F6}"/>
               </a:ext>
             </a:extLst>
           </p:cNvPr>
@@ -5215,7 +6250,21 @@
                 <a:ea typeface="+mn-lt"/>
                 <a:cs typeface="+mn-lt"/>
               </a:rPr>
-              <a:t>There are efficiency and inefficiency (areas of improvement) in achieving customer satisfaction </a:t>
+              <a:t>A high percentage of customers are satisfied </a:t>
+            </a:r>
+            <a:r>
+              <a:rPr lang="en-US" dirty="0" err="1">
+                <a:ea typeface="+mn-lt"/>
+                <a:cs typeface="+mn-lt"/>
+              </a:rPr>
+              <a:t>Olist's</a:t>
+            </a:r>
+            <a:r>
+              <a:rPr lang="en-US" dirty="0">
+                <a:ea typeface="+mn-lt"/>
+                <a:cs typeface="+mn-lt"/>
+              </a:rPr>
+              <a:t> products and services. The overall Avg review score is 4.1.</a:t>
             </a:r>
             <a:endParaRPr lang="en-US" dirty="0"/>
           </a:p>
@@ -5224,7 +6273,7 @@
     </p:spTree>
     <p:extLst>
       <p:ext uri="{BB962C8B-B14F-4D97-AF65-F5344CB8AC3E}">
-        <p14:creationId xmlns:p14="http://schemas.microsoft.com/office/powerpoint/2010/main" val="3949373795"/>
+        <p14:creationId xmlns:p14="http://schemas.microsoft.com/office/powerpoint/2010/main" val="2792175852"/>
       </p:ext>
     </p:extLst>
   </p:cSld>
@@ -5256,6 +6305,102 @@
           <p:cNvPr id="2" name="Title 1">
             <a:extLst>
               <a:ext uri="{FF2B5EF4-FFF2-40B4-BE49-F238E27FC236}">
+                <a16:creationId xmlns:a16="http://schemas.microsoft.com/office/drawing/2014/main" id="{0C465D98-4C27-1AFF-EFD2-E84698C5C239}"/>
+              </a:ext>
+            </a:extLst>
+          </p:cNvPr>
+          <p:cNvSpPr>
+            <a:spLocks noGrp="1"/>
+          </p:cNvSpPr>
+          <p:nvPr>
+            <p:ph type="title"/>
+          </p:nvPr>
+        </p:nvSpPr>
+        <p:spPr/>
+        <p:txBody>
+          <a:bodyPr/>
+          <a:lstStyle/>
+          <a:p>
+            <a:r>
+              <a:rPr lang="en-US" dirty="0">
+                <a:ea typeface="+mj-lt"/>
+                <a:cs typeface="+mj-lt"/>
+              </a:rPr>
+              <a:t>Are we performing well or poorly in terms of customer satisfaction?</a:t>
+            </a:r>
+            <a:endParaRPr lang="en-US" dirty="0"/>
+          </a:p>
+        </p:txBody>
+      </p:sp>
+      <p:sp>
+        <p:nvSpPr>
+          <p:cNvPr id="3" name="Content Placeholder 2">
+            <a:extLst>
+              <a:ext uri="{FF2B5EF4-FFF2-40B4-BE49-F238E27FC236}">
+                <a16:creationId xmlns:a16="http://schemas.microsoft.com/office/drawing/2014/main" id="{846EC2FF-CFA1-0A4C-1487-9631A3B330AA}"/>
+              </a:ext>
+            </a:extLst>
+          </p:cNvPr>
+          <p:cNvSpPr>
+            <a:spLocks noGrp="1"/>
+          </p:cNvSpPr>
+          <p:nvPr>
+            <p:ph idx="1"/>
+          </p:nvPr>
+        </p:nvSpPr>
+        <p:spPr/>
+        <p:txBody>
+          <a:bodyPr vert="horz" lIns="91440" tIns="45720" rIns="91440" bIns="45720" rtlCol="0" anchor="t">
+            <a:normAutofit/>
+          </a:bodyPr>
+          <a:lstStyle/>
+          <a:p>
+            <a:r>
+              <a:rPr lang="en-US" dirty="0">
+                <a:ea typeface="+mn-lt"/>
+                <a:cs typeface="+mn-lt"/>
+              </a:rPr>
+              <a:t>There are efficiency and inefficiency (areas of improvement) in achieving customer satisfaction </a:t>
+            </a:r>
+            <a:endParaRPr lang="en-US" dirty="0"/>
+          </a:p>
+        </p:txBody>
+      </p:sp>
+    </p:spTree>
+    <p:extLst>
+      <p:ext uri="{BB962C8B-B14F-4D97-AF65-F5344CB8AC3E}">
+        <p14:creationId xmlns:p14="http://schemas.microsoft.com/office/powerpoint/2010/main" val="3949373795"/>
+      </p:ext>
+    </p:extLst>
+  </p:cSld>
+  <p:clrMapOvr>
+    <a:masterClrMapping/>
+  </p:clrMapOvr>
+</p:sld>
+</file>
+
+<file path=ppt/slides/slide6.xml><?xml version="1.0" encoding="utf-8"?>
+<p:sld xmlns:a="http://schemas.openxmlformats.org/drawingml/2006/main" xmlns:r="http://schemas.openxmlformats.org/officeDocument/2006/relationships" xmlns:p="http://schemas.openxmlformats.org/presentationml/2006/main">
+  <p:cSld>
+    <p:spTree>
+      <p:nvGrpSpPr>
+        <p:cNvPr id="1" name=""/>
+        <p:cNvGrpSpPr/>
+        <p:nvPr/>
+      </p:nvGrpSpPr>
+      <p:grpSpPr>
+        <a:xfrm>
+          <a:off x="0" y="0"/>
+          <a:ext cx="0" cy="0"/>
+          <a:chOff x="0" y="0"/>
+          <a:chExt cx="0" cy="0"/>
+        </a:xfrm>
+      </p:grpSpPr>
+      <p:sp>
+        <p:nvSpPr>
+          <p:cNvPr id="2" name="Title 1">
+            <a:extLst>
+              <a:ext uri="{FF2B5EF4-FFF2-40B4-BE49-F238E27FC236}">
                 <a16:creationId xmlns:a16="http://schemas.microsoft.com/office/drawing/2014/main" id="{62E8E8F0-5CFA-2E30-CB47-48CF1DB868A1}"/>
               </a:ext>
             </a:extLst>
@@ -5328,7 +6473,7 @@
 </p:sld>
 </file>
 
-<file path=ppt/slides/slide6.xml><?xml version="1.0" encoding="utf-8"?>
+<file path=ppt/slides/slide7.xml><?xml version="1.0" encoding="utf-8"?>
 <p:sld xmlns:a="http://schemas.openxmlformats.org/drawingml/2006/main" xmlns:r="http://schemas.openxmlformats.org/officeDocument/2006/relationships" xmlns:p="http://schemas.openxmlformats.org/presentationml/2006/main">
   <p:cSld>
     <p:spTree>
@@ -5420,151 +6565,6 @@
 </p:sld>
 </file>
 
-<file path=ppt/slides/slide7.xml><?xml version="1.0" encoding="utf-8"?>
-<p:sld xmlns:a="http://schemas.openxmlformats.org/drawingml/2006/main" xmlns:r="http://schemas.openxmlformats.org/officeDocument/2006/relationships" xmlns:p="http://schemas.openxmlformats.org/presentationml/2006/main">
-  <p:cSld>
-    <p:spTree>
-      <p:nvGrpSpPr>
-        <p:cNvPr id="1" name=""/>
-        <p:cNvGrpSpPr/>
-        <p:nvPr/>
-      </p:nvGrpSpPr>
-      <p:grpSpPr>
-        <a:xfrm>
-          <a:off x="0" y="0"/>
-          <a:ext cx="0" cy="0"/>
-          <a:chOff x="0" y="0"/>
-          <a:chExt cx="0" cy="0"/>
-        </a:xfrm>
-      </p:grpSpPr>
-      <p:sp>
-        <p:nvSpPr>
-          <p:cNvPr id="2" name="Title 1">
-            <a:extLst>
-              <a:ext uri="{FF2B5EF4-FFF2-40B4-BE49-F238E27FC236}">
-                <a16:creationId xmlns:a16="http://schemas.microsoft.com/office/drawing/2014/main" id="{E273E5C4-2771-5C62-A258-B348C319390B}"/>
-              </a:ext>
-            </a:extLst>
-          </p:cNvPr>
-          <p:cNvSpPr>
-            <a:spLocks noGrp="1"/>
-          </p:cNvSpPr>
-          <p:nvPr>
-            <p:ph type="title"/>
-          </p:nvPr>
-        </p:nvSpPr>
-        <p:spPr/>
-        <p:txBody>
-          <a:bodyPr/>
-          <a:lstStyle/>
-          <a:p>
-            <a:r>
-              <a:rPr lang="en-US" dirty="0">
-                <a:ea typeface="+mj-lt"/>
-                <a:cs typeface="+mj-lt"/>
-              </a:rPr>
-              <a:t>What are the 5 regions of Brazil?</a:t>
-            </a:r>
-            <a:endParaRPr lang="en-US" dirty="0"/>
-          </a:p>
-          <a:p>
-            <a:endParaRPr lang="en-US"/>
-          </a:p>
-        </p:txBody>
-      </p:sp>
-      <p:sp>
-        <p:nvSpPr>
-          <p:cNvPr id="3" name="Content Placeholder 2">
-            <a:extLst>
-              <a:ext uri="{FF2B5EF4-FFF2-40B4-BE49-F238E27FC236}">
-                <a16:creationId xmlns:a16="http://schemas.microsoft.com/office/drawing/2014/main" id="{B4745C8A-C4A5-86C6-FF17-62F6C0003E4A}"/>
-              </a:ext>
-            </a:extLst>
-          </p:cNvPr>
-          <p:cNvSpPr>
-            <a:spLocks noGrp="1"/>
-          </p:cNvSpPr>
-          <p:nvPr>
-            <p:ph idx="1"/>
-          </p:nvPr>
-        </p:nvSpPr>
-        <p:spPr/>
-        <p:txBody>
-          <a:bodyPr vert="horz" lIns="91440" tIns="45720" rIns="91440" bIns="45720" rtlCol="0" anchor="t">
-            <a:normAutofit/>
-          </a:bodyPr>
-          <a:lstStyle/>
-          <a:p>
-            <a:r>
-              <a:rPr lang="en-US" dirty="0">
-                <a:latin typeface="Arial"/>
-                <a:ea typeface="+mn-lt"/>
-                <a:cs typeface="Arial"/>
-              </a:rPr>
-              <a:t>Central west - population 14 million</a:t>
-            </a:r>
-          </a:p>
-          <a:p>
-            <a:r>
-              <a:rPr lang="en-US" dirty="0">
-                <a:latin typeface="Arial"/>
-                <a:ea typeface="+mn-lt"/>
-                <a:cs typeface="Arial"/>
-              </a:rPr>
-              <a:t>Southeast - population 85 million</a:t>
-            </a:r>
-          </a:p>
-          <a:p>
-            <a:r>
-              <a:rPr lang="en-US" dirty="0">
-                <a:latin typeface="Arial"/>
-                <a:ea typeface="+mn-lt"/>
-                <a:cs typeface="Arial"/>
-              </a:rPr>
-              <a:t>South - population 28 million</a:t>
-            </a:r>
-          </a:p>
-          <a:p>
-            <a:r>
-              <a:rPr lang="en-US" dirty="0">
-                <a:latin typeface="Arial"/>
-                <a:ea typeface="+mn-lt"/>
-                <a:cs typeface="Arial"/>
-              </a:rPr>
-              <a:t>Northeast - population 56 million</a:t>
-            </a:r>
-          </a:p>
-          <a:p>
-            <a:r>
-              <a:rPr lang="en-US" dirty="0">
-                <a:latin typeface="Arial"/>
-                <a:ea typeface="+mn-lt"/>
-                <a:cs typeface="Arial"/>
-              </a:rPr>
-              <a:t>North - population 18 million</a:t>
-            </a:r>
-          </a:p>
-          <a:p>
-            <a:endParaRPr lang="en-US" dirty="0">
-              <a:latin typeface="Arial"/>
-              <a:cs typeface="Arial"/>
-            </a:endParaRPr>
-          </a:p>
-        </p:txBody>
-      </p:sp>
-    </p:spTree>
-    <p:extLst>
-      <p:ext uri="{BB962C8B-B14F-4D97-AF65-F5344CB8AC3E}">
-        <p14:creationId xmlns:p14="http://schemas.microsoft.com/office/powerpoint/2010/main" val="746205801"/>
-      </p:ext>
-    </p:extLst>
-  </p:cSld>
-  <p:clrMapOvr>
-    <a:masterClrMapping/>
-  </p:clrMapOvr>
-</p:sld>
-</file>
-
 <file path=ppt/slides/slide8.xml><?xml version="1.0" encoding="utf-8"?>
 <p:sld xmlns:a="http://schemas.openxmlformats.org/drawingml/2006/main" xmlns:r="http://schemas.openxmlformats.org/officeDocument/2006/relationships" xmlns:p="http://schemas.openxmlformats.org/presentationml/2006/main">
   <p:cSld>
@@ -5587,7 +6587,7 @@
           <p:cNvPr id="2" name="Title 1">
             <a:extLst>
               <a:ext uri="{FF2B5EF4-FFF2-40B4-BE49-F238E27FC236}">
-                <a16:creationId xmlns:a16="http://schemas.microsoft.com/office/drawing/2014/main" id="{9FF97E23-5807-E21F-46B6-6C0D01A39E1D}"/>
+                <a16:creationId xmlns:a16="http://schemas.microsoft.com/office/drawing/2014/main" id="{E273E5C4-2771-5C62-A258-B348C319390B}"/>
               </a:ext>
             </a:extLst>
           </p:cNvPr>
@@ -5604,9 +6604,16 @@
           <a:lstStyle/>
           <a:p>
             <a:r>
-              <a:rPr lang="en-US" dirty="0"/>
-              <a:t>Demographics</a:t>
-            </a:r>
+              <a:rPr lang="en-US" dirty="0">
+                <a:ea typeface="+mj-lt"/>
+                <a:cs typeface="+mj-lt"/>
+              </a:rPr>
+              <a:t>What are the 5 regions of Brazil?</a:t>
+            </a:r>
+            <a:endParaRPr lang="en-US" dirty="0"/>
+          </a:p>
+          <a:p>
+            <a:endParaRPr lang="en-US"/>
           </a:p>
         </p:txBody>
       </p:sp>
@@ -5615,7 +6622,7 @@
           <p:cNvPr id="3" name="Content Placeholder 2">
             <a:extLst>
               <a:ext uri="{FF2B5EF4-FFF2-40B4-BE49-F238E27FC236}">
-                <a16:creationId xmlns:a16="http://schemas.microsoft.com/office/drawing/2014/main" id="{22C5C36C-A687-2123-361E-C9F69B3BB20D}"/>
+                <a16:creationId xmlns:a16="http://schemas.microsoft.com/office/drawing/2014/main" id="{B4745C8A-C4A5-86C6-FF17-62F6C0003E4A}"/>
               </a:ext>
             </a:extLst>
           </p:cNvPr>
@@ -5634,25 +6641,66 @@
           <a:lstStyle/>
           <a:p>
             <a:r>
-              <a:rPr lang="en-US" dirty="0"/>
-              <a:t>Median age in Brazil sits at approximately 35 years in 2026</a:t>
-            </a:r>
-          </a:p>
-          <a:p>
-            <a:r>
-              <a:rPr lang="en-US" dirty="0"/>
-              <a:t>Approximately 88 percent of Brazilians live in urban areas</a:t>
-            </a:r>
-          </a:p>
-          <a:p>
-            <a:endParaRPr lang="en-US" dirty="0"/>
+              <a:rPr lang="en-US" dirty="0">
+                <a:latin typeface="Arial"/>
+                <a:ea typeface="+mn-lt"/>
+                <a:cs typeface="Arial"/>
+              </a:rPr>
+              <a:t>Central west - population 14 million</a:t>
+            </a:r>
+          </a:p>
+          <a:p>
+            <a:r>
+              <a:rPr lang="en-US" dirty="0">
+                <a:latin typeface="Arial"/>
+                <a:ea typeface="+mn-lt"/>
+                <a:cs typeface="Arial"/>
+              </a:rPr>
+              <a:t>Southeast - population 85 million</a:t>
+            </a:r>
+          </a:p>
+          <a:p>
+            <a:r>
+              <a:rPr lang="en-US" dirty="0">
+                <a:latin typeface="Arial"/>
+                <a:ea typeface="+mn-lt"/>
+                <a:cs typeface="Arial"/>
+              </a:rPr>
+              <a:t>South - population 28 million</a:t>
+            </a:r>
+          </a:p>
+          <a:p>
+            <a:r>
+              <a:rPr lang="en-US" dirty="0">
+                <a:latin typeface="Arial"/>
+                <a:ea typeface="+mn-lt"/>
+                <a:cs typeface="Arial"/>
+              </a:rPr>
+              <a:t>Northeast - population 56 million</a:t>
+            </a:r>
+          </a:p>
+          <a:p>
+            <a:r>
+              <a:rPr lang="en-US" dirty="0">
+                <a:latin typeface="Arial"/>
+                <a:ea typeface="+mn-lt"/>
+                <a:cs typeface="Arial"/>
+              </a:rPr>
+              <a:t>North - population 18 million</a:t>
+            </a:r>
+          </a:p>
+          <a:p>
+            <a:endParaRPr lang="en-US" dirty="0">
+              <a:latin typeface="Arial"/>
+              <a:cs typeface="Arial"/>
+            </a:endParaRPr>
           </a:p>
         </p:txBody>
       </p:sp>
     </p:spTree>
     <p:extLst>
       <p:ext uri="{BB962C8B-B14F-4D97-AF65-F5344CB8AC3E}">
-        <p14:creationId xmlns:p14="http://schemas.microsoft.com/office/powerpoint/2010/main" val="1171114330"/>
+        <p14:creationId xmlns:p14="http://schemas.microsoft.com/office/powerpoint/2010/main" val="746205801"/>
       </p:ext>
     </p:extLst>
   </p:cSld>
@@ -5684,7 +6732,7 @@
           <p:cNvPr id="2" name="Title 1">
             <a:extLst>
               <a:ext uri="{FF2B5EF4-FFF2-40B4-BE49-F238E27FC236}">
-                <a16:creationId xmlns:a16="http://schemas.microsoft.com/office/drawing/2014/main" id="{6A65815F-268F-D02B-F3CD-2CC87977DDB0}"/>
+                <a16:creationId xmlns:a16="http://schemas.microsoft.com/office/drawing/2014/main" id="{9FF97E23-5807-E21F-46B6-6C0D01A39E1D}"/>
               </a:ext>
             </a:extLst>
           </p:cNvPr>
@@ -5701,13 +6749,9 @@
           <a:lstStyle/>
           <a:p>
             <a:r>
-              <a:rPr lang="en-US" dirty="0">
-                <a:ea typeface="+mj-lt"/>
-                <a:cs typeface="+mj-lt"/>
-              </a:rPr>
-              <a:t>how can we improve customer experience and satisfaction?</a:t>
-            </a:r>
-            <a:endParaRPr lang="en-US" dirty="0"/>
+              <a:rPr lang="en-US" dirty="0"/>
+              <a:t>Demographics</a:t>
+            </a:r>
           </a:p>
         </p:txBody>
       </p:sp>
@@ -5716,7 +6760,7 @@
           <p:cNvPr id="3" name="Content Placeholder 2">
             <a:extLst>
               <a:ext uri="{FF2B5EF4-FFF2-40B4-BE49-F238E27FC236}">
-                <a16:creationId xmlns:a16="http://schemas.microsoft.com/office/drawing/2014/main" id="{859362E9-0117-5F56-7250-43D98A78EE20}"/>
+                <a16:creationId xmlns:a16="http://schemas.microsoft.com/office/drawing/2014/main" id="{22C5C36C-A687-2123-361E-C9F69B3BB20D}"/>
               </a:ext>
             </a:extLst>
           </p:cNvPr>
@@ -5730,69 +6774,22 @@
         <p:spPr/>
         <p:txBody>
           <a:bodyPr vert="horz" lIns="91440" tIns="45720" rIns="91440" bIns="45720" rtlCol="0" anchor="t">
-            <a:normAutofit lnSpcReduction="10000"/>
+            <a:normAutofit/>
           </a:bodyPr>
           <a:lstStyle/>
           <a:p>
             <a:r>
-              <a:rPr lang="en-US" dirty="0">
-                <a:ea typeface="+mn-lt"/>
-                <a:cs typeface="+mn-lt"/>
-              </a:rPr>
-              <a:t>According to comments</a:t>
-            </a:r>
-            <a:endParaRPr lang="en-US" dirty="0"/>
-          </a:p>
-          <a:p>
-            <a:endParaRPr lang="en-US"/>
-          </a:p>
-          <a:p>
-            <a:r>
-              <a:rPr lang="en-US" dirty="0">
-                <a:ea typeface="+mn-lt"/>
-                <a:cs typeface="+mn-lt"/>
-              </a:rPr>
-              <a:t>deliver the item within the deadline</a:t>
-            </a:r>
-            <a:endParaRPr lang="en-US" dirty="0"/>
-          </a:p>
-          <a:p>
-            <a:endParaRPr lang="en-US"/>
-          </a:p>
-          <a:p>
-            <a:r>
-              <a:rPr lang="en-US" dirty="0">
-                <a:ea typeface="+mn-lt"/>
-                <a:cs typeface="+mn-lt"/>
-              </a:rPr>
-              <a:t>deliver all ordered items</a:t>
-            </a:r>
-            <a:endParaRPr lang="en-US" dirty="0"/>
-          </a:p>
-          <a:p>
-            <a:endParaRPr lang="en-US"/>
-          </a:p>
-          <a:p>
-            <a:r>
-              <a:rPr lang="en-US" dirty="0">
-                <a:ea typeface="+mn-lt"/>
-                <a:cs typeface="+mn-lt"/>
-              </a:rPr>
-              <a:t> Better communication with customers regarding latest updates</a:t>
-            </a:r>
-            <a:endParaRPr lang="en-US" dirty="0"/>
-          </a:p>
-          <a:p>
-            <a:endParaRPr lang="en-US"/>
-          </a:p>
-          <a:p>
-            <a:r>
-              <a:rPr lang="en-US" dirty="0">
-                <a:ea typeface="+mn-lt"/>
-                <a:cs typeface="+mn-lt"/>
-              </a:rPr>
-              <a:t>Improve quality and good packaging of product</a:t>
-            </a:r>
+              <a:rPr lang="en-US" dirty="0"/>
+              <a:t>Median age in Brazil sits at approximately 35 years in 2026</a:t>
+            </a:r>
+          </a:p>
+          <a:p>
+            <a:r>
+              <a:rPr lang="en-US" dirty="0"/>
+              <a:t>Approximately 88 percent of Brazilians live in urban areas</a:t>
+            </a:r>
+          </a:p>
+          <a:p>
             <a:endParaRPr lang="en-US" dirty="0"/>
           </a:p>
         </p:txBody>
@@ -5800,7 +6797,7 @@
     </p:spTree>
     <p:extLst>
       <p:ext uri="{BB962C8B-B14F-4D97-AF65-F5344CB8AC3E}">
-        <p14:creationId xmlns:p14="http://schemas.microsoft.com/office/powerpoint/2010/main" val="2120510006"/>
+        <p14:creationId xmlns:p14="http://schemas.microsoft.com/office/powerpoint/2010/main" val="1171114330"/>
       </p:ext>
     </p:extLst>
   </p:cSld>
